--- a/Kargo_Takip_Sistemi_Sunum.pptx
+++ b/Kargo_Takip_Sistemi_Sunum.pptx
@@ -513,7 +513,7 @@
           <a:lstStyle/>
           <a:p>
             <a:r>
-              <a:t>Açılış: Projemin amacı yalnızca çalışan bir REST API geliştirmek değil; uçtan uca kod yazma → test etme → olay üretme → olay tüketme → ölçme → görselleştirme → container'da çalıştırma zincirini kurmak.</a:t>
+              <a:t>Projenin amacı yalnızca çalışan bir REST API geliştirmek değil; uçtan uca kod yazma → test etme → olay üretme → olay tüketme → ölçme → görselleştirme → container'da çalıştırma zincirini kurmak.</a:t>
             </a:r>
           </a:p>
         </p:txBody>
@@ -583,7 +583,7 @@
           <a:lstStyle/>
           <a:p>
             <a:r>
-              <a:t>Dockerfile tek, iki servis onu paylaşıyor (flask ve consumer). Kafka için bitnami yerine resmi apache imajı kullanıldı.</a:t>
+              <a:t>Dockerfile tek, iki servis onu paylaşıyor. Kafka için bitnami yerine resmi apache imajı kullanıldı (bitnami etiketlerini taşıdı). Healthcheck sayesinde consumer, Kafka hazır olmadan event dinlemeye başlamıyor.</a:t>
             </a:r>
           </a:p>
         </p:txBody>
@@ -653,7 +653,7 @@
           <a:lstStyle/>
           <a:p>
             <a:r>
-              <a:t>Sıra: 1) curl POST /cargo 2) consumer logları 3) /metrics 4) Prometheus targets 5) Grafana dashboard. Her adımda sayının değiştiğini göster.</a:t>
+              <a:t>Slayt 11'de geçiş yap, slayt 12'ye hemen geçme. Burada canlı demoyu yap, sonra dön. Sıra: 1) curl POST /cargo 2) consumer logları 3) /metrics 4) Prometheus targets 5) Grafana dashboard.</a:t>
             </a:r>
           </a:p>
         </p:txBody>
@@ -723,7 +723,7 @@
           <a:lstStyle/>
           <a:p>
             <a:r>
-              <a:t>Kapanış: Nihai hedef kod yazma → test → olay üret → olay tüket → ölç → görselleştir → container'da çalıştırma zinciriydi ve hepsi tamamlandı.</a:t>
+              <a:t>Kapanış: Nihai hedef kod yazma → test etme → olay üretme → olay tüketme → ölçme → görselleştirme → container'da çalıştırma zinciriydi ve hepsi tamamlandı. Soru varsa mimari, terminal durum kuralı, test izolasyonu veya metrik tasarımı üzerinden git.</a:t>
             </a:r>
           </a:p>
         </p:txBody>
@@ -793,7 +793,7 @@
           <a:lstStyle/>
           <a:p>
             <a:r>
-              <a:t>Problemi somut anlat: kargo oluştuğunda kimseyi haberdar etmem gerekiyor. Doğrudan çağırsam API yavaşlar. Kafka tampon görevi görür.</a:t>
+              <a:t>Kargo oluştuğunda birden çok tarafı haberdar etmem gerekiyor. Doğrudan çağırsam API yavaşlar ve biri çökerse tüm zincir düşer. Kafka tampon görevi görür: event yazılır, ilgilenenler sonra kendi hızında okur.</a:t>
             </a:r>
           </a:p>
         </p:txBody>
@@ -863,7 +863,7 @@
           <a:lstStyle/>
           <a:p>
             <a:r>
-              <a:t>Sağa doğru akışı takip et. API iki şey yapar: SQLite'a yazar, Kafka'ya event gönderir. Consumer bu event'leri okuyup metrik üretir.</a:t>
+              <a:t>Akışı soldan sağa takip et. API iki iş yapar: SQLite'a yazar, Kafka'ya event gönderir. Consumer event'i okuyup işler ve kendi metrik sayacını artırır. Prometheus iki hedefi scrape eder, Grafana sorgular.</a:t>
             </a:r>
           </a:p>
         </p:txBody>
@@ -933,7 +933,7 @@
           <a:lstStyle/>
           <a:p>
             <a:r>
-              <a:t>Terminal durum kuralını vurgula — iş kuralı models.py'de, testlerle doğrulanmış. Hocaya 'bu neden önemli' diye sorulursa: gerçek hayatta teslim edilmiş kargo iptal edilemez.</a:t>
+              <a:t>Terminal durum kuralını vurgula. Hoca 'neden önemli' diye sorarsa: gerçek hayatta teslim edilmiş kargo iptal edilemez. Kural models.py'de, test_06 ve test_06b ile doğrulandı.</a:t>
             </a:r>
           </a:p>
         </p:txBody>
@@ -1003,7 +1003,7 @@
           <a:lstStyle/>
           <a:p>
             <a:r>
-              <a:t>Key olarak cargo_id vermek önemli bir karar. Kafka key'e göre partition atar; key yoksa round-robin dağıtır ve sıralama bozulur.</a:t>
+              <a:t>Key olarak cargo_id vermek önemli bir karar. Kafka key'e göre partition atar; key yoksa round-robin dağıtır. Aynı kargonun iki olayının farklı partition'a gitmesi sıralama garantisini kırar.</a:t>
             </a:r>
           </a:p>
         </p:txBody>
@@ -1073,7 +1073,7 @@
           <a:lstStyle/>
           <a:p>
             <a:r>
-              <a:t>Bu benim en çok savunduğum tasarım kararı. Testler KAFKA_ENABLED=0 ile Kafka olmadan koşar. Production'da kalıcı kuyruk (dead-letter) eklenebilir.</a:t>
+              <a:t>En çok savunduğum tasarım kararı bu. Testler KAFKA_ENABLED=0 ile Kafka olmadan koşar; API açılışı Kafka'ya bağlı değildir. Production'da kalıcı kuyruk (dead-letter topic) eklenebilir — ileriye yönelik öneri.</a:t>
             </a:r>
           </a:p>
         </p:txBody>
@@ -1143,7 +1143,7 @@
           <a:lstStyle/>
           <a:p>
             <a:r>
-              <a:t>Counter vs Gauge farkını bilmesi gerekebilir: Counter sadece artar, Gauge ini çekilir. Kargo sayısı monoton artar -&gt; Counter.</a:t>
+              <a:t>Counter ile Gauge farkını bilmesi gerekebilir: Counter sadece artar, Gauge ini çekilir. Kargo sayısı monoton artar → Counter doğru seçim. Histogram'ın _sum/_count/_max üretmesi ortalama süre hesabını mümkün kılar.</a:t>
             </a:r>
           </a:p>
         </p:txBody>
@@ -1213,7 +1213,7 @@
           <a:lstStyle/>
           <a:p>
             <a:r>
-              <a:t>Burada ekran görüntüsü göster. Provisioning'in avantajını açıkla: ortamlar arası tekrarlanabilirlik.</a:t>
+              <a:t>Provisioning'in avantajını açıkla: ortamlar arası tekrarlanabilirlik, sürüm kontrolü, container yeniden başlasa da korunması.</a:t>
             </a:r>
           </a:p>
         </p:txBody>
@@ -1283,7 +1283,7 @@
           <a:lstStyle/>
           <a:p>
             <a:r>
-              <a:t>EN ÖNEMLİ NOKTA: API sayaçları ile consumer sayaçları birebir aynı (20/17/5/2). Bu, event'lerin kayıpsız iletildiğinin kanıtı.</a:t>
+              <a:t>EN ÖNEMLİ NOKTA BURASI: API'nin ürettiği sayaçlar ile consumer'ın saydığı event sayısı birebir aynı (20/17/5/2). Producer ile consumer farklı süreçlerde, farklı sayaçlarla çalışıyor; eşleşmeleri event'lerin kayıpsız iletildiğinin somut kanıtı. Bunu vurgula.</a:t>
             </a:r>
           </a:p>
         </p:txBody>
@@ -4299,47 +4299,155 @@
       <p:grpSpPr/>
       <p:sp>
         <p:nvSpPr>
-          <p:cNvPr id="2" name="Title 1"/>
-          <p:cNvSpPr>
-            <a:spLocks noGrp="1"/>
-          </p:cNvSpPr>
-          <p:nvPr>
-            <p:ph type="title"/>
-          </p:nvPr>
-        </p:nvSpPr>
-        <p:spPr/>
-        <p:txBody>
-          <a:bodyPr/>
-          <a:lstStyle/>
-          <a:p>
-            <a:r>
-              <a:t>Kafka ve Grafana Tabanlı Kargo Takip Sistemi</a:t>
-            </a:r>
-          </a:p>
-        </p:txBody>
-      </p:sp>
-      <p:sp>
-        <p:nvSpPr>
-          <p:cNvPr id="3" name="Text Placeholder 2"/>
-          <p:cNvSpPr>
-            <a:spLocks noGrp="1"/>
-          </p:cNvSpPr>
-          <p:nvPr>
-            <p:ph type="body" idx="1"/>
-          </p:nvPr>
-        </p:nvSpPr>
-        <p:spPr/>
-        <p:txBody>
-          <a:bodyPr/>
-          <a:lstStyle/>
-          <a:p>
-            <a:r>
+          <p:cNvPr id="2" name="TextBox 1"/>
+          <p:cNvSpPr txBox="1"/>
+          <p:nvPr/>
+        </p:nvSpPr>
+        <p:spPr>
+          <a:xfrm>
+            <a:off x="822960" y="2286000"/>
+            <a:ext cx="10515600" cy="640080"/>
+          </a:xfrm>
+          <a:prstGeom prst="rect">
+            <a:avLst/>
+          </a:prstGeom>
+          <a:noFill/>
+        </p:spPr>
+        <p:txBody>
+          <a:bodyPr wrap="square">
+            <a:spAutoFit/>
+          </a:bodyPr>
+          <a:lstStyle/>
+          <a:p>
+            <a:pPr algn="ctr">
+              <a:lnSpc>
+                <a:spcPct val="100000"/>
+              </a:lnSpc>
+            </a:pPr>
+            <a:r>
+              <a:rPr sz="4000" b="1">
+                <a:solidFill>
+                  <a:srgbClr val="FFFFFF"/>
+                </a:solidFill>
+                <a:latin typeface="Arial"/>
+              </a:rPr>
+              <a:t>Kafka ve Grafana Tabanlı</a:t>
+            </a:r>
+          </a:p>
+        </p:txBody>
+      </p:sp>
+      <p:sp>
+        <p:nvSpPr>
+          <p:cNvPr id="3" name="TextBox 2"/>
+          <p:cNvSpPr txBox="1"/>
+          <p:nvPr/>
+        </p:nvSpPr>
+        <p:spPr>
+          <a:xfrm>
+            <a:off x="822960" y="2971800"/>
+            <a:ext cx="10515600" cy="640080"/>
+          </a:xfrm>
+          <a:prstGeom prst="rect">
+            <a:avLst/>
+          </a:prstGeom>
+          <a:noFill/>
+        </p:spPr>
+        <p:txBody>
+          <a:bodyPr wrap="square">
+            <a:spAutoFit/>
+          </a:bodyPr>
+          <a:lstStyle/>
+          <a:p>
+            <a:pPr algn="ctr">
+              <a:lnSpc>
+                <a:spcPct val="100000"/>
+              </a:lnSpc>
+            </a:pPr>
+            <a:r>
+              <a:rPr sz="4000" b="1">
+                <a:solidFill>
+                  <a:srgbClr val="1F6FEB"/>
+                </a:solidFill>
+                <a:latin typeface="Arial"/>
+              </a:rPr>
+              <a:t>Kargo Takip Sistemi</a:t>
+            </a:r>
+          </a:p>
+        </p:txBody>
+      </p:sp>
+      <p:sp>
+        <p:nvSpPr>
+          <p:cNvPr id="4" name="TextBox 3"/>
+          <p:cNvSpPr txBox="1"/>
+          <p:nvPr/>
+        </p:nvSpPr>
+        <p:spPr>
+          <a:xfrm>
+            <a:off x="822960" y="3886200"/>
+            <a:ext cx="10515600" cy="365760"/>
+          </a:xfrm>
+          <a:prstGeom prst="rect">
+            <a:avLst/>
+          </a:prstGeom>
+          <a:noFill/>
+        </p:spPr>
+        <p:txBody>
+          <a:bodyPr wrap="square">
+            <a:spAutoFit/>
+          </a:bodyPr>
+          <a:lstStyle/>
+          <a:p>
+            <a:pPr algn="ctr">
+              <a:lnSpc>
+                <a:spcPct val="100000"/>
+              </a:lnSpc>
+            </a:pPr>
+            <a:r>
+              <a:rPr sz="1600" b="0">
+                <a:solidFill>
+                  <a:srgbClr val="829AB1"/>
+                </a:solidFill>
+                <a:latin typeface="Arial"/>
+              </a:rPr>
               <a:t>Olay tabanlı mimari ile izlenebilir bir REST API</a:t>
             </a:r>
           </a:p>
-          <a:p/>
-          <a:p>
-            <a:r>
+        </p:txBody>
+      </p:sp>
+      <p:sp>
+        <p:nvSpPr>
+          <p:cNvPr id="5" name="TextBox 4"/>
+          <p:cNvSpPr txBox="1"/>
+          <p:nvPr/>
+        </p:nvSpPr>
+        <p:spPr>
+          <a:xfrm>
+            <a:off x="822960" y="5029200"/>
+            <a:ext cx="10515600" cy="365760"/>
+          </a:xfrm>
+          <a:prstGeom prst="rect">
+            <a:avLst/>
+          </a:prstGeom>
+          <a:noFill/>
+        </p:spPr>
+        <p:txBody>
+          <a:bodyPr wrap="square">
+            <a:spAutoFit/>
+          </a:bodyPr>
+          <a:lstStyle/>
+          <a:p>
+            <a:pPr algn="ctr">
+              <a:lnSpc>
+                <a:spcPct val="100000"/>
+              </a:lnSpc>
+            </a:pPr>
+            <a:r>
+              <a:rPr sz="1500" b="1">
+                <a:solidFill>
+                  <a:srgbClr val="FFFFFF"/>
+                </a:solidFill>
+                <a:latin typeface="Arial"/>
+              </a:rPr>
               <a:t>Erdem Emin</a:t>
             </a:r>
           </a:p>
@@ -4365,73 +4473,54 @@
       <p:grpSpPr/>
       <p:sp>
         <p:nvSpPr>
-          <p:cNvPr id="2" name="Title 1"/>
-          <p:cNvSpPr>
-            <a:spLocks noGrp="1"/>
-          </p:cNvSpPr>
-          <p:nvPr>
-            <p:ph type="title"/>
-          </p:nvPr>
-        </p:nvSpPr>
-        <p:spPr/>
-        <p:txBody>
-          <a:bodyPr/>
-          <a:lstStyle/>
-          <a:p>
-            <a:r>
-              <a:t>Docker Compose: Tek Komut</a:t>
-            </a:r>
-          </a:p>
-        </p:txBody>
-      </p:sp>
-      <p:sp>
-        <p:nvSpPr>
-          <p:cNvPr id="3" name="Content Placeholder 2"/>
-          <p:cNvSpPr>
-            <a:spLocks noGrp="1"/>
-          </p:cNvSpPr>
-          <p:nvPr>
-            <p:ph idx="1"/>
-          </p:nvPr>
-        </p:nvSpPr>
-        <p:spPr/>
-        <p:txBody>
-          <a:bodyPr/>
-          <a:lstStyle/>
-          <a:p>
-            <a:pPr/>
-            <a:r>
-              <a:rPr/>
-              <a:t>Kafka KRaft modunda çalışır (ZooKeeper yok)</a:t>
-            </a:r>
-          </a:p>
-          <a:p>
-            <a:pPr/>
-            <a:r>
-              <a:rPr/>
-              <a:t>Healthcheck: servisler Kafka hazır olmadan başlamaz</a:t>
-            </a:r>
-          </a:p>
-          <a:p>
-            <a:pPr/>
-            <a:r>
-              <a:rPr/>
-              <a:t>Volume: SQLite kalıcı, docker compose down -v ile temizlenir</a:t>
+          <p:cNvPr id="2" name="TextBox 1"/>
+          <p:cNvSpPr txBox="1"/>
+          <p:nvPr/>
+        </p:nvSpPr>
+        <p:spPr>
+          <a:xfrm>
+            <a:off x="548640" y="320040"/>
+            <a:ext cx="11064240" cy="731520"/>
+          </a:xfrm>
+          <a:prstGeom prst="rect">
+            <a:avLst/>
+          </a:prstGeom>
+          <a:noFill/>
+        </p:spPr>
+        <p:txBody>
+          <a:bodyPr wrap="square">
+            <a:spAutoFit/>
+          </a:bodyPr>
+          <a:lstStyle/>
+          <a:p>
+            <a:pPr algn="l">
+              <a:lnSpc>
+                <a:spcPct val="100000"/>
+              </a:lnSpc>
+            </a:pPr>
+            <a:r>
+              <a:rPr sz="3000" b="1">
+                <a:solidFill>
+                  <a:srgbClr val="0B2545"/>
+                </a:solidFill>
+                <a:latin typeface="Arial"/>
+              </a:rPr>
+              <a:t>Docker Compose: Tek Komutla Beş Servis</a:t>
             </a:r>
           </a:p>
         </p:txBody>
       </p:sp>
       <p:graphicFrame>
         <p:nvGraphicFramePr>
-          <p:cNvPr id="4" name="Table 3"/>
+          <p:cNvPr id="3" name="Table 2"/>
           <p:cNvGraphicFramePr>
             <a:graphicFrameLocks noGrp="1"/>
           </p:cNvGraphicFramePr>
           <p:nvPr/>
         </p:nvGraphicFramePr>
         <p:xfrm>
-          <a:off x="914400" y="1828800"/>
-          <a:ext cx="5486400" cy="1828800"/>
+          <a:off x="685800" y="1325880"/>
+          <a:ext cx="10789918" cy="1755648"/>
         </p:xfrm>
         <a:graphic>
           <a:graphicData uri="http://schemas.openxmlformats.org/drawingml/2006/table">
@@ -4440,22 +4529,32 @@
                 <a:tableStyleId>{5C22544A-7EE6-4342-B048-85BDC9FD1C3A}</a:tableStyleId>
               </a:tblPr>
               <a:tblGrid>
-                <a:gridCol w="1828800"/>
-                <a:gridCol w="1828800"/>
-                <a:gridCol w="1828800"/>
+                <a:gridCol w="2814761"/>
+                <a:gridCol w="6333213"/>
+                <a:gridCol w="1641944"/>
               </a:tblGrid>
-              <a:tr h="304800">
+              <a:tr h="292608">
                 <a:tc>
                   <a:txBody>
                     <a:bodyPr/>
                     <a:lstStyle/>
                     <a:p>
                       <a:r>
+                        <a:rPr sz="1100" b="1">
+                          <a:solidFill>
+                            <a:srgbClr val="FFFFFF"/>
+                          </a:solidFill>
+                          <a:latin typeface="Arial"/>
+                        </a:rPr>
                         <a:t>Servis</a:t>
                       </a:r>
                     </a:p>
                   </a:txBody>
-                  <a:tcPr/>
+                  <a:tcPr marL="64008" marR="64008" marT="27432" marB="27432" anchor="ctr">
+                    <a:solidFill>
+                      <a:srgbClr val="1F6FEB"/>
+                    </a:solidFill>
+                  </a:tcPr>
                 </a:tc>
                 <a:tc>
                   <a:txBody>
@@ -4463,11 +4562,21 @@
                     <a:lstStyle/>
                     <a:p>
                       <a:r>
+                        <a:rPr sz="1100" b="1">
+                          <a:solidFill>
+                            <a:srgbClr val="FFFFFF"/>
+                          </a:solidFill>
+                          <a:latin typeface="Arial"/>
+                        </a:rPr>
                         <a:t>İmaj</a:t>
                       </a:r>
                     </a:p>
                   </a:txBody>
-                  <a:tcPr/>
+                  <a:tcPr marL="64008" marR="64008" marT="27432" marB="27432" anchor="ctr">
+                    <a:solidFill>
+                      <a:srgbClr val="1F6FEB"/>
+                    </a:solidFill>
+                  </a:tcPr>
                 </a:tc>
                 <a:tc>
                   <a:txBody>
@@ -4475,25 +4584,45 @@
                     <a:lstStyle/>
                     <a:p>
                       <a:r>
+                        <a:rPr sz="1100" b="1">
+                          <a:solidFill>
+                            <a:srgbClr val="FFFFFF"/>
+                          </a:solidFill>
+                          <a:latin typeface="Arial"/>
+                        </a:rPr>
                         <a:t>Port</a:t>
                       </a:r>
                     </a:p>
                   </a:txBody>
-                  <a:tcPr/>
+                  <a:tcPr marL="64008" marR="64008" marT="27432" marB="27432" anchor="ctr">
+                    <a:solidFill>
+                      <a:srgbClr val="1F6FEB"/>
+                    </a:solidFill>
+                  </a:tcPr>
                 </a:tc>
               </a:tr>
-              <a:tr h="304800">
+              <a:tr h="292608">
                 <a:tc>
                   <a:txBody>
                     <a:bodyPr/>
                     <a:lstStyle/>
                     <a:p>
                       <a:r>
+                        <a:rPr sz="1100" b="0">
+                          <a:solidFill>
+                            <a:srgbClr val="0B2545"/>
+                          </a:solidFill>
+                          <a:latin typeface="Arial"/>
+                        </a:rPr>
                         <a:t>kafka</a:t>
                       </a:r>
                     </a:p>
                   </a:txBody>
-                  <a:tcPr/>
+                  <a:tcPr marL="64008" marR="64008" marT="27432" marB="27432" anchor="ctr">
+                    <a:solidFill>
+                      <a:srgbClr val="FFFFFF"/>
+                    </a:solidFill>
+                  </a:tcPr>
                 </a:tc>
                 <a:tc>
                   <a:txBody>
@@ -4501,11 +4630,21 @@
                     <a:lstStyle/>
                     <a:p>
                       <a:r>
+                        <a:rPr sz="1100" b="0">
+                          <a:solidFill>
+                            <a:srgbClr val="0B2545"/>
+                          </a:solidFill>
+                          <a:latin typeface="Arial"/>
+                        </a:rPr>
                         <a:t>apache/kafka:3.7.1</a:t>
                       </a:r>
                     </a:p>
                   </a:txBody>
-                  <a:tcPr/>
+                  <a:tcPr marL="64008" marR="64008" marT="27432" marB="27432" anchor="ctr">
+                    <a:solidFill>
+                      <a:srgbClr val="FFFFFF"/>
+                    </a:solidFill>
+                  </a:tcPr>
                 </a:tc>
                 <a:tc>
                   <a:txBody>
@@ -4513,25 +4652,45 @@
                     <a:lstStyle/>
                     <a:p>
                       <a:r>
+                        <a:rPr sz="1100" b="0">
+                          <a:solidFill>
+                            <a:srgbClr val="0B2545"/>
+                          </a:solidFill>
+                          <a:latin typeface="Arial"/>
+                        </a:rPr>
                         <a:t>9092</a:t>
                       </a:r>
                     </a:p>
                   </a:txBody>
-                  <a:tcPr/>
+                  <a:tcPr marL="64008" marR="64008" marT="27432" marB="27432" anchor="ctr">
+                    <a:solidFill>
+                      <a:srgbClr val="FFFFFF"/>
+                    </a:solidFill>
+                  </a:tcPr>
                 </a:tc>
               </a:tr>
-              <a:tr h="304800">
+              <a:tr h="292608">
                 <a:tc>
                   <a:txBody>
                     <a:bodyPr/>
                     <a:lstStyle/>
                     <a:p>
                       <a:r>
+                        <a:rPr sz="1100" b="0">
+                          <a:solidFill>
+                            <a:srgbClr val="0B2545"/>
+                          </a:solidFill>
+                          <a:latin typeface="Arial"/>
+                        </a:rPr>
                         <a:t>flask</a:t>
                       </a:r>
                     </a:p>
                   </a:txBody>
-                  <a:tcPr/>
+                  <a:tcPr marL="64008" marR="64008" marT="27432" marB="27432" anchor="ctr">
+                    <a:solidFill>
+                      <a:srgbClr val="F4F6F8"/>
+                    </a:solidFill>
+                  </a:tcPr>
                 </a:tc>
                 <a:tc>
                   <a:txBody>
@@ -4539,11 +4698,21 @@
                     <a:lstStyle/>
                     <a:p>
                       <a:r>
-                        <a:t>Dockerfile</a:t>
+                        <a:rPr sz="1100" b="0">
+                          <a:solidFill>
+                            <a:srgbClr val="0B2545"/>
+                          </a:solidFill>
+                          <a:latin typeface="Arial"/>
+                        </a:rPr>
+                        <a:t>Dockerfile (build)</a:t>
                       </a:r>
                     </a:p>
                   </a:txBody>
-                  <a:tcPr/>
+                  <a:tcPr marL="64008" marR="64008" marT="27432" marB="27432" anchor="ctr">
+                    <a:solidFill>
+                      <a:srgbClr val="F4F6F8"/>
+                    </a:solidFill>
+                  </a:tcPr>
                 </a:tc>
                 <a:tc>
                   <a:txBody>
@@ -4551,25 +4720,45 @@
                     <a:lstStyle/>
                     <a:p>
                       <a:r>
+                        <a:rPr sz="1100" b="0">
+                          <a:solidFill>
+                            <a:srgbClr val="0B2545"/>
+                          </a:solidFill>
+                          <a:latin typeface="Arial"/>
+                        </a:rPr>
                         <a:t>5000</a:t>
                       </a:r>
                     </a:p>
                   </a:txBody>
-                  <a:tcPr/>
+                  <a:tcPr marL="64008" marR="64008" marT="27432" marB="27432" anchor="ctr">
+                    <a:solidFill>
+                      <a:srgbClr val="F4F6F8"/>
+                    </a:solidFill>
+                  </a:tcPr>
                 </a:tc>
               </a:tr>
-              <a:tr h="304800">
+              <a:tr h="292608">
                 <a:tc>
                   <a:txBody>
                     <a:bodyPr/>
                     <a:lstStyle/>
                     <a:p>
                       <a:r>
+                        <a:rPr sz="1100" b="0">
+                          <a:solidFill>
+                            <a:srgbClr val="0B2545"/>
+                          </a:solidFill>
+                          <a:latin typeface="Arial"/>
+                        </a:rPr>
                         <a:t>consumer</a:t>
                       </a:r>
                     </a:p>
                   </a:txBody>
-                  <a:tcPr/>
+                  <a:tcPr marL="64008" marR="64008" marT="27432" marB="27432" anchor="ctr">
+                    <a:solidFill>
+                      <a:srgbClr val="FFFFFF"/>
+                    </a:solidFill>
+                  </a:tcPr>
                 </a:tc>
                 <a:tc>
                   <a:txBody>
@@ -4577,11 +4766,21 @@
                     <a:lstStyle/>
                     <a:p>
                       <a:r>
-                        <a:t>Dockerfile</a:t>
+                        <a:rPr sz="1100" b="0">
+                          <a:solidFill>
+                            <a:srgbClr val="0B2545"/>
+                          </a:solidFill>
+                          <a:latin typeface="Arial"/>
+                        </a:rPr>
+                        <a:t>Dockerfile (build)</a:t>
                       </a:r>
                     </a:p>
                   </a:txBody>
-                  <a:tcPr/>
+                  <a:tcPr marL="64008" marR="64008" marT="27432" marB="27432" anchor="ctr">
+                    <a:solidFill>
+                      <a:srgbClr val="FFFFFF"/>
+                    </a:solidFill>
+                  </a:tcPr>
                 </a:tc>
                 <a:tc>
                   <a:txBody>
@@ -4589,25 +4788,45 @@
                     <a:lstStyle/>
                     <a:p>
                       <a:r>
+                        <a:rPr sz="1100" b="0">
+                          <a:solidFill>
+                            <a:srgbClr val="0B2545"/>
+                          </a:solidFill>
+                          <a:latin typeface="Arial"/>
+                        </a:rPr>
                         <a:t>9091</a:t>
                       </a:r>
                     </a:p>
                   </a:txBody>
-                  <a:tcPr/>
+                  <a:tcPr marL="64008" marR="64008" marT="27432" marB="27432" anchor="ctr">
+                    <a:solidFill>
+                      <a:srgbClr val="FFFFFF"/>
+                    </a:solidFill>
+                  </a:tcPr>
                 </a:tc>
               </a:tr>
-              <a:tr h="304800">
+              <a:tr h="292608">
                 <a:tc>
                   <a:txBody>
                     <a:bodyPr/>
                     <a:lstStyle/>
                     <a:p>
                       <a:r>
+                        <a:rPr sz="1100" b="0">
+                          <a:solidFill>
+                            <a:srgbClr val="0B2545"/>
+                          </a:solidFill>
+                          <a:latin typeface="Arial"/>
+                        </a:rPr>
                         <a:t>prometheus</a:t>
                       </a:r>
                     </a:p>
                   </a:txBody>
-                  <a:tcPr/>
+                  <a:tcPr marL="64008" marR="64008" marT="27432" marB="27432" anchor="ctr">
+                    <a:solidFill>
+                      <a:srgbClr val="F4F6F8"/>
+                    </a:solidFill>
+                  </a:tcPr>
                 </a:tc>
                 <a:tc>
                   <a:txBody>
@@ -4615,11 +4834,21 @@
                     <a:lstStyle/>
                     <a:p>
                       <a:r>
+                        <a:rPr sz="1100" b="0">
+                          <a:solidFill>
+                            <a:srgbClr val="0B2545"/>
+                          </a:solidFill>
+                          <a:latin typeface="Arial"/>
+                        </a:rPr>
                         <a:t>prom/prometheus:v2.54.1</a:t>
                       </a:r>
                     </a:p>
                   </a:txBody>
-                  <a:tcPr/>
+                  <a:tcPr marL="64008" marR="64008" marT="27432" marB="27432" anchor="ctr">
+                    <a:solidFill>
+                      <a:srgbClr val="F4F6F8"/>
+                    </a:solidFill>
+                  </a:tcPr>
                 </a:tc>
                 <a:tc>
                   <a:txBody>
@@ -4627,25 +4856,45 @@
                     <a:lstStyle/>
                     <a:p>
                       <a:r>
+                        <a:rPr sz="1100" b="0">
+                          <a:solidFill>
+                            <a:srgbClr val="0B2545"/>
+                          </a:solidFill>
+                          <a:latin typeface="Arial"/>
+                        </a:rPr>
                         <a:t>9090</a:t>
                       </a:r>
                     </a:p>
                   </a:txBody>
-                  <a:tcPr/>
+                  <a:tcPr marL="64008" marR="64008" marT="27432" marB="27432" anchor="ctr">
+                    <a:solidFill>
+                      <a:srgbClr val="F4F6F8"/>
+                    </a:solidFill>
+                  </a:tcPr>
                 </a:tc>
               </a:tr>
-              <a:tr h="304800">
+              <a:tr h="292608">
                 <a:tc>
                   <a:txBody>
                     <a:bodyPr/>
                     <a:lstStyle/>
                     <a:p>
                       <a:r>
+                        <a:rPr sz="1100" b="0">
+                          <a:solidFill>
+                            <a:srgbClr val="0B2545"/>
+                          </a:solidFill>
+                          <a:latin typeface="Arial"/>
+                        </a:rPr>
                         <a:t>grafana</a:t>
                       </a:r>
                     </a:p>
                   </a:txBody>
-                  <a:tcPr/>
+                  <a:tcPr marL="64008" marR="64008" marT="27432" marB="27432" anchor="ctr">
+                    <a:solidFill>
+                      <a:srgbClr val="FFFFFF"/>
+                    </a:solidFill>
+                  </a:tcPr>
                 </a:tc>
                 <a:tc>
                   <a:txBody>
@@ -4653,11 +4902,21 @@
                     <a:lstStyle/>
                     <a:p>
                       <a:r>
+                        <a:rPr sz="1100" b="0">
+                          <a:solidFill>
+                            <a:srgbClr val="0B2545"/>
+                          </a:solidFill>
+                          <a:latin typeface="Arial"/>
+                        </a:rPr>
                         <a:t>grafana/grafana:11.2.0</a:t>
                       </a:r>
                     </a:p>
                   </a:txBody>
-                  <a:tcPr/>
+                  <a:tcPr marL="64008" marR="64008" marT="27432" marB="27432" anchor="ctr">
+                    <a:solidFill>
+                      <a:srgbClr val="FFFFFF"/>
+                    </a:solidFill>
+                  </a:tcPr>
                 </a:tc>
                 <a:tc>
                   <a:txBody>
@@ -4665,17 +4924,126 @@
                     <a:lstStyle/>
                     <a:p>
                       <a:r>
+                        <a:rPr sz="1100" b="0">
+                          <a:solidFill>
+                            <a:srgbClr val="0B2545"/>
+                          </a:solidFill>
+                          <a:latin typeface="Arial"/>
+                        </a:rPr>
                         <a:t>3000</a:t>
                       </a:r>
                     </a:p>
                   </a:txBody>
-                  <a:tcPr/>
+                  <a:tcPr marL="64008" marR="64008" marT="27432" marB="27432" anchor="ctr">
+                    <a:solidFill>
+                      <a:srgbClr val="FFFFFF"/>
+                    </a:solidFill>
+                  </a:tcPr>
                 </a:tc>
               </a:tr>
             </a:tbl>
           </a:graphicData>
         </a:graphic>
       </p:graphicFrame>
+      <p:sp>
+        <p:nvSpPr>
+          <p:cNvPr id="4" name="TextBox 3"/>
+          <p:cNvSpPr txBox="1"/>
+          <p:nvPr/>
+        </p:nvSpPr>
+        <p:spPr>
+          <a:xfrm>
+            <a:off x="685800" y="3703320"/>
+            <a:ext cx="10789920" cy="2194560"/>
+          </a:xfrm>
+          <a:prstGeom prst="rect">
+            <a:avLst/>
+          </a:prstGeom>
+          <a:noFill/>
+        </p:spPr>
+        <p:txBody>
+          <a:bodyPr wrap="square">
+            <a:spAutoFit/>
+          </a:bodyPr>
+          <a:lstStyle/>
+          <a:p>
+            <a:pPr>
+              <a:lnSpc>
+                <a:spcPct val="115000"/>
+              </a:lnSpc>
+              <a:spcAft>
+                <a:spcPts val="800"/>
+              </a:spcAft>
+            </a:pPr>
+            <a:r>
+              <a:rPr sz="1400">
+                <a:solidFill>
+                  <a:srgbClr val="0B2545"/>
+                </a:solidFill>
+                <a:latin typeface="Arial"/>
+              </a:rPr>
+              <a:t>•  Kafka KRaft modunda çalışır — ZooKeeper gerekmez (CLUSTER_ID ile küme kimliği)</a:t>
+            </a:r>
+          </a:p>
+          <a:p>
+            <a:pPr>
+              <a:lnSpc>
+                <a:spcPct val="115000"/>
+              </a:lnSpc>
+              <a:spcAft>
+                <a:spcPts val="800"/>
+              </a:spcAft>
+            </a:pPr>
+            <a:r>
+              <a:rPr sz="1400">
+                <a:solidFill>
+                  <a:srgbClr val="0B2545"/>
+                </a:solidFill>
+                <a:latin typeface="Arial"/>
+              </a:rPr>
+              <a:t>•  Healthcheck: servisler Kafka hazır olmadan başlamaz (depends_on: service_healthy)</a:t>
+            </a:r>
+          </a:p>
+          <a:p>
+            <a:pPr>
+              <a:lnSpc>
+                <a:spcPct val="115000"/>
+              </a:lnSpc>
+              <a:spcAft>
+                <a:spcPts val="800"/>
+              </a:spcAft>
+            </a:pPr>
+            <a:r>
+              <a:rPr sz="1400">
+                <a:solidFill>
+                  <a:srgbClr val="0B2545"/>
+                </a:solidFill>
+                <a:latin typeface="Arial"/>
+              </a:rPr>
+              <a:t>•  Volume: SQLite kalıcı; docker compose down -v ile temizlenir</a:t>
+            </a:r>
+          </a:p>
+          <a:p>
+            <a:pPr>
+              <a:lnSpc>
+                <a:spcPct val="115000"/>
+              </a:lnSpc>
+              <a:spcAft>
+                <a:spcPts val="800"/>
+              </a:spcAft>
+            </a:pPr>
+            <a:r>
+              <a:rPr sz="1400">
+                <a:solidFill>
+                  <a:srgbClr val="0B2545"/>
+                </a:solidFill>
+                <a:latin typeface="Arial"/>
+              </a:rPr>
+              <a:t>•  Tek Dockerfile iki servis tarafından paylaşılır (flask + consumer)</a:t>
+            </a:r>
+          </a:p>
+        </p:txBody>
+      </p:sp>
     </p:spTree>
   </p:cSld>
   <p:clrMapOvr>
@@ -4704,20 +5072,38 @@
       <p:grpSpPr/>
       <p:sp>
         <p:nvSpPr>
-          <p:cNvPr id="2" name="Title 1"/>
-          <p:cNvSpPr>
-            <a:spLocks noGrp="1"/>
-          </p:cNvSpPr>
-          <p:nvPr>
-            <p:ph type="title"/>
-          </p:nvPr>
-        </p:nvSpPr>
-        <p:spPr/>
-        <p:txBody>
-          <a:bodyPr/>
-          <a:lstStyle/>
-          <a:p>
-            <a:r>
+          <p:cNvPr id="2" name="TextBox 1"/>
+          <p:cNvSpPr txBox="1"/>
+          <p:nvPr/>
+        </p:nvSpPr>
+        <p:spPr>
+          <a:xfrm>
+            <a:off x="822960" y="2468880"/>
+            <a:ext cx="10515600" cy="822960"/>
+          </a:xfrm>
+          <a:prstGeom prst="rect">
+            <a:avLst/>
+          </a:prstGeom>
+          <a:noFill/>
+        </p:spPr>
+        <p:txBody>
+          <a:bodyPr wrap="square">
+            <a:spAutoFit/>
+          </a:bodyPr>
+          <a:lstStyle/>
+          <a:p>
+            <a:pPr algn="ctr">
+              <a:lnSpc>
+                <a:spcPct val="100000"/>
+              </a:lnSpc>
+            </a:pPr>
+            <a:r>
+              <a:rPr sz="5200" b="1">
+                <a:solidFill>
+                  <a:srgbClr val="FFFFFF"/>
+                </a:solidFill>
+                <a:latin typeface="Arial"/>
+              </a:rPr>
               <a:t>CANLI DEMO</a:t>
             </a:r>
           </a:p>
@@ -4725,21 +5111,78 @@
       </p:sp>
       <p:sp>
         <p:nvSpPr>
-          <p:cNvPr id="3" name="Text Placeholder 2"/>
-          <p:cNvSpPr>
-            <a:spLocks noGrp="1"/>
-          </p:cNvSpPr>
-          <p:nvPr>
-            <p:ph type="body" idx="1"/>
-          </p:nvPr>
-        </p:nvSpPr>
-        <p:spPr/>
-        <p:txBody>
-          <a:bodyPr/>
-          <a:lstStyle/>
-          <a:p>
-            <a:r>
-              <a:t>Kargo oluştur → Kafka event → Consumer → Prometheus → Grafana</a:t>
+          <p:cNvPr id="3" name="TextBox 2"/>
+          <p:cNvSpPr txBox="1"/>
+          <p:nvPr/>
+        </p:nvSpPr>
+        <p:spPr>
+          <a:xfrm>
+            <a:off x="822960" y="3474720"/>
+            <a:ext cx="10515600" cy="457200"/>
+          </a:xfrm>
+          <a:prstGeom prst="rect">
+            <a:avLst/>
+          </a:prstGeom>
+          <a:noFill/>
+        </p:spPr>
+        <p:txBody>
+          <a:bodyPr wrap="square">
+            <a:spAutoFit/>
+          </a:bodyPr>
+          <a:lstStyle/>
+          <a:p>
+            <a:pPr algn="ctr">
+              <a:lnSpc>
+                <a:spcPct val="100000"/>
+              </a:lnSpc>
+            </a:pPr>
+            <a:r>
+              <a:rPr sz="2000" b="0">
+                <a:solidFill>
+                  <a:srgbClr val="FFFFFF"/>
+                </a:solidFill>
+                <a:latin typeface="Arial"/>
+              </a:rPr>
+              <a:t>Kargo oluştur  →  Kafka event  →  Consumer  →  Prometheus  →  Grafana</a:t>
+            </a:r>
+          </a:p>
+        </p:txBody>
+      </p:sp>
+      <p:sp>
+        <p:nvSpPr>
+          <p:cNvPr id="4" name="TextBox 3"/>
+          <p:cNvSpPr txBox="1"/>
+          <p:nvPr/>
+        </p:nvSpPr>
+        <p:spPr>
+          <a:xfrm>
+            <a:off x="822960" y="4297680"/>
+            <a:ext cx="10515600" cy="457200"/>
+          </a:xfrm>
+          <a:prstGeom prst="rect">
+            <a:avLst/>
+          </a:prstGeom>
+          <a:noFill/>
+        </p:spPr>
+        <p:txBody>
+          <a:bodyPr wrap="square">
+            <a:spAutoFit/>
+          </a:bodyPr>
+          <a:lstStyle/>
+          <a:p>
+            <a:pPr algn="ctr">
+              <a:lnSpc>
+                <a:spcPct val="100000"/>
+              </a:lnSpc>
+            </a:pPr>
+            <a:r>
+              <a:rPr sz="1700" b="1">
+                <a:solidFill>
+                  <a:srgbClr val="0B2545"/>
+                </a:solidFill>
+                <a:latin typeface="Consolas"/>
+              </a:rPr>
+              <a:t>bash scripts/demo.sh</a:t>
             </a:r>
           </a:p>
         </p:txBody>
@@ -4764,65 +5207,386 @@
       <p:grpSpPr/>
       <p:sp>
         <p:nvSpPr>
-          <p:cNvPr id="2" name="Title 1"/>
-          <p:cNvSpPr>
-            <a:spLocks noGrp="1"/>
-          </p:cNvSpPr>
-          <p:nvPr>
-            <p:ph type="title"/>
-          </p:nvPr>
-        </p:nvSpPr>
-        <p:spPr/>
-        <p:txBody>
-          <a:bodyPr/>
-          <a:lstStyle/>
-          <a:p>
-            <a:r>
-              <a:t>Sonuç ve Öneriler</a:t>
-            </a:r>
-          </a:p>
-        </p:txBody>
-      </p:sp>
-      <p:sp>
-        <p:nvSpPr>
-          <p:cNvPr id="3" name="Content Placeholder 2"/>
-          <p:cNvSpPr>
-            <a:spLocks noGrp="1"/>
-          </p:cNvSpPr>
-          <p:nvPr>
-            <p:ph idx="1"/>
-          </p:nvPr>
-        </p:nvSpPr>
-        <p:spPr/>
-        <p:txBody>
-          <a:bodyPr/>
-          <a:lstStyle/>
-          <a:p>
-            <a:pPr/>
-            <a:r>
-              <a:rPr/>
+          <p:cNvPr id="2" name="TextBox 1"/>
+          <p:cNvSpPr txBox="1"/>
+          <p:nvPr/>
+        </p:nvSpPr>
+        <p:spPr>
+          <a:xfrm>
+            <a:off x="548640" y="320040"/>
+            <a:ext cx="11064240" cy="731520"/>
+          </a:xfrm>
+          <a:prstGeom prst="rect">
+            <a:avLst/>
+          </a:prstGeom>
+          <a:noFill/>
+        </p:spPr>
+        <p:txBody>
+          <a:bodyPr wrap="square">
+            <a:spAutoFit/>
+          </a:bodyPr>
+          <a:lstStyle/>
+          <a:p>
+            <a:pPr algn="l">
+              <a:lnSpc>
+                <a:spcPct val="100000"/>
+              </a:lnSpc>
+            </a:pPr>
+            <a:r>
+              <a:rPr sz="3000" b="1">
+                <a:solidFill>
+                  <a:srgbClr val="0B2545"/>
+                </a:solidFill>
+                <a:latin typeface="Arial"/>
+              </a:rPr>
+              <a:t>Sonuç ve İleriye Yönelik Öneriler</a:t>
+            </a:r>
+          </a:p>
+        </p:txBody>
+      </p:sp>
+      <p:sp>
+        <p:nvSpPr>
+          <p:cNvPr id="3" name="Rectangle 2"/>
+          <p:cNvSpPr/>
+          <p:nvPr/>
+        </p:nvSpPr>
+        <p:spPr>
+          <a:xfrm>
+            <a:off x="685800" y="1280160"/>
+            <a:ext cx="10789920" cy="457200"/>
+          </a:xfrm>
+          <a:prstGeom prst="rect">
+            <a:avLst/>
+          </a:prstGeom>
+          <a:solidFill>
+            <a:srgbClr val="1F6FEB"/>
+          </a:solidFill>
+          <a:ln>
+            <a:noFill/>
+          </a:ln>
+        </p:spPr>
+        <p:style>
+          <a:lnRef idx="1">
+            <a:schemeClr val="accent1"/>
+          </a:lnRef>
+          <a:fillRef idx="3">
+            <a:schemeClr val="accent1"/>
+          </a:fillRef>
+          <a:effectRef idx="2">
+            <a:schemeClr val="accent1"/>
+          </a:effectRef>
+          <a:fontRef idx="minor">
+            <a:schemeClr val="lt1"/>
+          </a:fontRef>
+        </p:style>
+        <p:txBody>
+          <a:bodyPr rtlCol="0" anchor="ctr" wrap="square" lIns="45720" rIns="45720" tIns="22860" bIns="22860"/>
+          <a:lstStyle/>
+          <a:p>
+            <a:pPr algn="ctr"/>
+            <a:r>
+              <a:rPr sz="1400" b="1">
+                <a:solidFill>
+                  <a:srgbClr val="FFFFFF"/>
+                </a:solidFill>
+                <a:latin typeface="Arial"/>
+              </a:rPr>
               <a:t>5 servis tek komutla çalışıyor, uçtan uca zincir doğrulandı</a:t>
             </a:r>
           </a:p>
-          <a:p>
-            <a:pPr/>
-            <a:r>
-              <a:rPr/>
-              <a:t>API sayaçları ile consumer sayaçlarının eşleşmesi → kayıpsız event iletimi kanıtı</a:t>
-            </a:r>
-          </a:p>
-          <a:p>
-            <a:pPr/>
-            <a:r>
-              <a:rPr/>
-              <a:t>Öğrenilen: olay tabanlı mimari, mesaj anahtarı kullanımı, metrik tasarımı, test izolasyonu, Docker orkestrasyonu</a:t>
-            </a:r>
-          </a:p>
-          <a:p>
-            <a:pPr/>
-            <a:r>
-              <a:rPr/>
-              <a:t>İleriye yönelik: PostgreSQL, confluent-kafka, Alertmanager, web arayüzü, gerçek taşıyıcı entegrasyonu</a:t>
+        </p:txBody>
+      </p:sp>
+      <p:sp>
+        <p:nvSpPr>
+          <p:cNvPr id="4" name="TextBox 3"/>
+          <p:cNvSpPr txBox="1"/>
+          <p:nvPr/>
+        </p:nvSpPr>
+        <p:spPr>
+          <a:xfrm>
+            <a:off x="685800" y="1920240"/>
+            <a:ext cx="10789920" cy="320040"/>
+          </a:xfrm>
+          <a:prstGeom prst="rect">
+            <a:avLst/>
+          </a:prstGeom>
+          <a:noFill/>
+        </p:spPr>
+        <p:txBody>
+          <a:bodyPr wrap="square">
+            <a:spAutoFit/>
+          </a:bodyPr>
+          <a:lstStyle/>
+          <a:p>
+            <a:pPr algn="l">
+              <a:lnSpc>
+                <a:spcPct val="100000"/>
+              </a:lnSpc>
+            </a:pPr>
+            <a:r>
+              <a:rPr sz="1500" b="1">
+                <a:solidFill>
+                  <a:srgbClr val="1F6FEB"/>
+                </a:solidFill>
+                <a:latin typeface="Arial"/>
+              </a:rPr>
+              <a:t>Öğrenilen kavramlar</a:t>
+            </a:r>
+          </a:p>
+        </p:txBody>
+      </p:sp>
+      <p:sp>
+        <p:nvSpPr>
+          <p:cNvPr id="5" name="TextBox 4"/>
+          <p:cNvSpPr txBox="1"/>
+          <p:nvPr/>
+        </p:nvSpPr>
+        <p:spPr>
+          <a:xfrm>
+            <a:off x="685800" y="2286000"/>
+            <a:ext cx="10789920" cy="2194560"/>
+          </a:xfrm>
+          <a:prstGeom prst="rect">
+            <a:avLst/>
+          </a:prstGeom>
+          <a:noFill/>
+        </p:spPr>
+        <p:txBody>
+          <a:bodyPr wrap="square">
+            <a:spAutoFit/>
+          </a:bodyPr>
+          <a:lstStyle/>
+          <a:p>
+            <a:pPr>
+              <a:lnSpc>
+                <a:spcPct val="115000"/>
+              </a:lnSpc>
+              <a:spcAft>
+                <a:spcPts val="600"/>
+              </a:spcAft>
+            </a:pPr>
+            <a:r>
+              <a:rPr sz="1400">
+                <a:solidFill>
+                  <a:srgbClr val="0B2545"/>
+                </a:solidFill>
+                <a:latin typeface="Arial"/>
+              </a:rPr>
+              <a:t>•  Olay tabanlı mimari ve gevşek bağımlılık</a:t>
+            </a:r>
+          </a:p>
+          <a:p>
+            <a:pPr>
+              <a:lnSpc>
+                <a:spcPct val="115000"/>
+              </a:lnSpc>
+              <a:spcAft>
+                <a:spcPts val="600"/>
+              </a:spcAft>
+            </a:pPr>
+            <a:r>
+              <a:rPr sz="1400">
+                <a:solidFill>
+                  <a:srgbClr val="0B2545"/>
+                </a:solidFill>
+                <a:latin typeface="Arial"/>
+              </a:rPr>
+              <a:t>•  Mesaj kuyruğu ayrışması — API yavaşlasa bile event kaybolmaz</a:t>
+            </a:r>
+          </a:p>
+          <a:p>
+            <a:pPr>
+              <a:lnSpc>
+                <a:spcPct val="115000"/>
+              </a:lnSpc>
+              <a:spcAft>
+                <a:spcPts val="600"/>
+              </a:spcAft>
+            </a:pPr>
+            <a:r>
+              <a:rPr sz="1400">
+                <a:solidFill>
+                  <a:srgbClr val="0B2545"/>
+                </a:solidFill>
+                <a:latin typeface="Arial"/>
+              </a:rPr>
+              <a:t>•  Mesaj anahtarı (key) kullanımı ve sıralama garantisi</a:t>
+            </a:r>
+          </a:p>
+          <a:p>
+            <a:pPr>
+              <a:lnSpc>
+                <a:spcPct val="115000"/>
+              </a:lnSpc>
+              <a:spcAft>
+                <a:spcPts val="600"/>
+              </a:spcAft>
+            </a:pPr>
+            <a:r>
+              <a:rPr sz="1400">
+                <a:solidFill>
+                  <a:srgbClr val="0B2545"/>
+                </a:solidFill>
+                <a:latin typeface="Arial"/>
+              </a:rPr>
+              <a:t>•  Metrik tasarımı: Counter/Histogram seçimi ve etiketleme</a:t>
+            </a:r>
+          </a:p>
+          <a:p>
+            <a:pPr>
+              <a:lnSpc>
+                <a:spcPct val="115000"/>
+              </a:lnSpc>
+              <a:spcAft>
+                <a:spcPts val="600"/>
+              </a:spcAft>
+            </a:pPr>
+            <a:r>
+              <a:rPr sz="1400">
+                <a:solidFill>
+                  <a:srgbClr val="0B2545"/>
+                </a:solidFill>
+                <a:latin typeface="Arial"/>
+              </a:rPr>
+              <a:t>•  Test izolasyonu: tmp_path ile her testin kendi veritabanı</a:t>
+            </a:r>
+          </a:p>
+          <a:p>
+            <a:pPr>
+              <a:lnSpc>
+                <a:spcPct val="115000"/>
+              </a:lnSpc>
+              <a:spcAft>
+                <a:spcPts val="600"/>
+              </a:spcAft>
+            </a:pPr>
+            <a:r>
+              <a:rPr sz="1400">
+                <a:solidFill>
+                  <a:srgbClr val="0B2545"/>
+                </a:solidFill>
+                <a:latin typeface="Arial"/>
+              </a:rPr>
+              <a:t>•  Docker orkestrasyonu: healthcheck, volume, provisioning</a:t>
+            </a:r>
+          </a:p>
+        </p:txBody>
+      </p:sp>
+      <p:sp>
+        <p:nvSpPr>
+          <p:cNvPr id="6" name="TextBox 5"/>
+          <p:cNvSpPr txBox="1"/>
+          <p:nvPr/>
+        </p:nvSpPr>
+        <p:spPr>
+          <a:xfrm>
+            <a:off x="685800" y="4434840"/>
+            <a:ext cx="10789920" cy="320040"/>
+          </a:xfrm>
+          <a:prstGeom prst="rect">
+            <a:avLst/>
+          </a:prstGeom>
+          <a:noFill/>
+        </p:spPr>
+        <p:txBody>
+          <a:bodyPr wrap="square">
+            <a:spAutoFit/>
+          </a:bodyPr>
+          <a:lstStyle/>
+          <a:p>
+            <a:pPr algn="l">
+              <a:lnSpc>
+                <a:spcPct val="100000"/>
+              </a:lnSpc>
+            </a:pPr>
+            <a:r>
+              <a:rPr sz="1500" b="1">
+                <a:solidFill>
+                  <a:srgbClr val="E85D04"/>
+                </a:solidFill>
+                <a:latin typeface="Arial"/>
+              </a:rPr>
+              <a:t>İleriye yönelik</a:t>
+            </a:r>
+          </a:p>
+        </p:txBody>
+      </p:sp>
+      <p:sp>
+        <p:nvSpPr>
+          <p:cNvPr id="7" name="TextBox 6"/>
+          <p:cNvSpPr txBox="1"/>
+          <p:nvPr/>
+        </p:nvSpPr>
+        <p:spPr>
+          <a:xfrm>
+            <a:off x="685800" y="4800600"/>
+            <a:ext cx="10789920" cy="1280160"/>
+          </a:xfrm>
+          <a:prstGeom prst="rect">
+            <a:avLst/>
+          </a:prstGeom>
+          <a:noFill/>
+        </p:spPr>
+        <p:txBody>
+          <a:bodyPr wrap="square">
+            <a:spAutoFit/>
+          </a:bodyPr>
+          <a:lstStyle/>
+          <a:p>
+            <a:pPr>
+              <a:lnSpc>
+                <a:spcPct val="115000"/>
+              </a:lnSpc>
+              <a:spcAft>
+                <a:spcPts val="600"/>
+              </a:spcAft>
+            </a:pPr>
+            <a:r>
+              <a:rPr sz="1400">
+                <a:solidFill>
+                  <a:srgbClr val="0B2545"/>
+                </a:solidFill>
+                <a:latin typeface="Arial"/>
+              </a:rPr>
+              <a:t>•  PostgreSQL'e geçiş ve confluent-kafka ile daha yüksek performans</a:t>
+            </a:r>
+          </a:p>
+          <a:p>
+            <a:pPr>
+              <a:lnSpc>
+                <a:spcPct val="115000"/>
+              </a:lnSpc>
+              <a:spcAft>
+                <a:spcPts val="600"/>
+              </a:spcAft>
+            </a:pPr>
+            <a:r>
+              <a:rPr sz="1400">
+                <a:solidFill>
+                  <a:srgbClr val="0B2545"/>
+                </a:solidFill>
+                <a:latin typeface="Arial"/>
+              </a:rPr>
+              <a:t>•  Prometheus alert kuralları ve Alertmanager ile otomatik bildirim</a:t>
+            </a:r>
+          </a:p>
+          <a:p>
+            <a:pPr>
+              <a:lnSpc>
+                <a:spcPct val="115000"/>
+              </a:lnSpc>
+              <a:spcAft>
+                <a:spcPts val="600"/>
+              </a:spcAft>
+            </a:pPr>
+            <a:r>
+              <a:rPr sz="1400">
+                <a:solidFill>
+                  <a:srgbClr val="0B2545"/>
+                </a:solidFill>
+                <a:latin typeface="Arial"/>
+              </a:rPr>
+              <a:t>•  Web arayüzü ve gerçek taşıyıcı entegrasyonu</a:t>
             </a:r>
           </a:p>
         </p:txBody>
@@ -4847,20 +5611,38 @@
       <p:grpSpPr/>
       <p:sp>
         <p:nvSpPr>
-          <p:cNvPr id="2" name="Title 1"/>
-          <p:cNvSpPr>
-            <a:spLocks noGrp="1"/>
-          </p:cNvSpPr>
-          <p:nvPr>
-            <p:ph type="title"/>
-          </p:nvPr>
-        </p:nvSpPr>
-        <p:spPr/>
-        <p:txBody>
-          <a:bodyPr/>
-          <a:lstStyle/>
-          <a:p>
-            <a:r>
+          <p:cNvPr id="2" name="TextBox 1"/>
+          <p:cNvSpPr txBox="1"/>
+          <p:nvPr/>
+        </p:nvSpPr>
+        <p:spPr>
+          <a:xfrm>
+            <a:off x="548640" y="320040"/>
+            <a:ext cx="11064240" cy="731520"/>
+          </a:xfrm>
+          <a:prstGeom prst="rect">
+            <a:avLst/>
+          </a:prstGeom>
+          <a:noFill/>
+        </p:spPr>
+        <p:txBody>
+          <a:bodyPr wrap="square">
+            <a:spAutoFit/>
+          </a:bodyPr>
+          <a:lstStyle/>
+          <a:p>
+            <a:pPr algn="l">
+              <a:lnSpc>
+                <a:spcPct val="100000"/>
+              </a:lnSpc>
+            </a:pPr>
+            <a:r>
+              <a:rPr sz="3000" b="1">
+                <a:solidFill>
+                  <a:srgbClr val="0B2545"/>
+                </a:solidFill>
+                <a:latin typeface="Arial"/>
+              </a:rPr>
               <a:t>Problem ve Çözüm</a:t>
             </a:r>
           </a:p>
@@ -4868,51 +5650,118 @@
       </p:sp>
       <p:sp>
         <p:nvSpPr>
-          <p:cNvPr id="3" name="Content Placeholder 2"/>
-          <p:cNvSpPr>
-            <a:spLocks noGrp="1"/>
-          </p:cNvSpPr>
-          <p:nvPr>
-            <p:ph idx="1"/>
-          </p:nvPr>
-        </p:nvSpPr>
-        <p:spPr/>
-        <p:txBody>
-          <a:bodyPr/>
-          <a:lstStyle/>
-          <a:p>
-            <a:pPr/>
-            <a:r>
-              <a:rPr/>
-              <a:t>Kargo durumu değişiklikleri birden fazla servise bildirilmelidir</a:t>
-            </a:r>
-          </a:p>
-          <a:p>
-            <a:pPr/>
-            <a:r>
-              <a:rPr/>
-              <a:t>Klasik yaklaşımda API her bileşene doğrudan bağlanır → sıkı bağımlılık</a:t>
-            </a:r>
-          </a:p>
-          <a:p>
-            <a:pPr/>
-            <a:r>
-              <a:rPr/>
-              <a:t>Çözüm: olay tabanlı mimari — API sadece olayı üretir, bağlı olanlar kendileri dinler</a:t>
-            </a:r>
-          </a:p>
-          <a:p>
-            <a:pPr/>
-            <a:r>
-              <a:rPr/>
-              <a:t>Sonuç: API yavaşlasa bile event'ler kaybolmaz, yeni servisler kolayca eklenir</a:t>
-            </a:r>
-          </a:p>
-          <a:p>
-            <a:pPr/>
-            <a:r>
-              <a:rPr/>
-              <a:t>Bu projede: Flask → Kafka → Consumer → Prometheus → Grafana</a:t>
+          <p:cNvPr id="3" name="TextBox 2"/>
+          <p:cNvSpPr txBox="1"/>
+          <p:nvPr/>
+        </p:nvSpPr>
+        <p:spPr>
+          <a:xfrm>
+            <a:off x="685800" y="1371600"/>
+            <a:ext cx="10789920" cy="3840480"/>
+          </a:xfrm>
+          <a:prstGeom prst="rect">
+            <a:avLst/>
+          </a:prstGeom>
+          <a:noFill/>
+        </p:spPr>
+        <p:txBody>
+          <a:bodyPr wrap="square">
+            <a:spAutoFit/>
+          </a:bodyPr>
+          <a:lstStyle/>
+          <a:p>
+            <a:pPr>
+              <a:lnSpc>
+                <a:spcPct val="115000"/>
+              </a:lnSpc>
+              <a:spcAft>
+                <a:spcPts val="1400"/>
+              </a:spcAft>
+            </a:pPr>
+            <a:r>
+              <a:rPr sz="1800">
+                <a:solidFill>
+                  <a:srgbClr val="0B2545"/>
+                </a:solidFill>
+                <a:latin typeface="Arial"/>
+              </a:rPr>
+              <a:t>•  Kargo durumu değişiklikleri birden fazla servise bildirilmelidir</a:t>
+            </a:r>
+          </a:p>
+          <a:p>
+            <a:pPr>
+              <a:lnSpc>
+                <a:spcPct val="115000"/>
+              </a:lnSpc>
+              <a:spcAft>
+                <a:spcPts val="1400"/>
+              </a:spcAft>
+            </a:pPr>
+            <a:r>
+              <a:rPr sz="1800">
+                <a:solidFill>
+                  <a:srgbClr val="0B2545"/>
+                </a:solidFill>
+                <a:latin typeface="Arial"/>
+              </a:rPr>
+              <a:t>•  Klasik yaklaşımda API her bileşene doğrudan bağlanır → sıkı bağımlılık</a:t>
+            </a:r>
+          </a:p>
+          <a:p>
+            <a:pPr>
+              <a:lnSpc>
+                <a:spcPct val="115000"/>
+              </a:lnSpc>
+              <a:spcAft>
+                <a:spcPts val="1400"/>
+              </a:spcAft>
+            </a:pPr>
+            <a:r>
+              <a:rPr sz="1800">
+                <a:solidFill>
+                  <a:srgbClr val="0B2545"/>
+                </a:solidFill>
+                <a:latin typeface="Arial"/>
+              </a:rPr>
+              <a:t>•  Çözüm: olay tabanlı mimari — API sadece olayı üretir, bağlı olanlar dinler</a:t>
+            </a:r>
+          </a:p>
+          <a:p>
+            <a:pPr>
+              <a:lnSpc>
+                <a:spcPct val="115000"/>
+              </a:lnSpc>
+              <a:spcAft>
+                <a:spcPts val="1400"/>
+              </a:spcAft>
+            </a:pPr>
+            <a:r>
+              <a:rPr sz="1800">
+                <a:solidFill>
+                  <a:srgbClr val="0B2545"/>
+                </a:solidFill>
+                <a:latin typeface="Arial"/>
+              </a:rPr>
+              <a:t>•  Sonuç: API yavaşlasa bile event'ler kaybolmaz, yeni servisler kolayca eklenir</a:t>
+            </a:r>
+          </a:p>
+          <a:p>
+            <a:pPr>
+              <a:lnSpc>
+                <a:spcPct val="115000"/>
+              </a:lnSpc>
+              <a:spcAft>
+                <a:spcPts val="1400"/>
+              </a:spcAft>
+            </a:pPr>
+            <a:r>
+              <a:rPr sz="1800">
+                <a:solidFill>
+                  <a:srgbClr val="0B2545"/>
+                </a:solidFill>
+                <a:latin typeface="Arial"/>
+              </a:rPr>
+              <a:t>•  Bu projede: Flask → Kafka → Consumer → Prometheus → Grafana</a:t>
             </a:r>
           </a:p>
         </p:txBody>
@@ -4937,20 +5786,38 @@
       <p:grpSpPr/>
       <p:sp>
         <p:nvSpPr>
-          <p:cNvPr id="2" name="Title 1"/>
-          <p:cNvSpPr>
-            <a:spLocks noGrp="1"/>
-          </p:cNvSpPr>
-          <p:nvPr>
-            <p:ph type="title"/>
-          </p:nvPr>
-        </p:nvSpPr>
-        <p:spPr/>
-        <p:txBody>
-          <a:bodyPr/>
-          <a:lstStyle/>
-          <a:p>
-            <a:r>
+          <p:cNvPr id="2" name="TextBox 1"/>
+          <p:cNvSpPr txBox="1"/>
+          <p:nvPr/>
+        </p:nvSpPr>
+        <p:spPr>
+          <a:xfrm>
+            <a:off x="548640" y="320040"/>
+            <a:ext cx="11064240" cy="731520"/>
+          </a:xfrm>
+          <a:prstGeom prst="rect">
+            <a:avLst/>
+          </a:prstGeom>
+          <a:noFill/>
+        </p:spPr>
+        <p:txBody>
+          <a:bodyPr wrap="square">
+            <a:spAutoFit/>
+          </a:bodyPr>
+          <a:lstStyle/>
+          <a:p>
+            <a:pPr algn="l">
+              <a:lnSpc>
+                <a:spcPct val="100000"/>
+              </a:lnSpc>
+            </a:pPr>
+            <a:r>
+              <a:rPr sz="3000" b="1">
+                <a:solidFill>
+                  <a:srgbClr val="0B2545"/>
+                </a:solidFill>
+                <a:latin typeface="Arial"/>
+              </a:rPr>
               <a:t>Sistem Mimarisi</a:t>
             </a:r>
           </a:p>
@@ -4958,44 +5825,24 @@
       </p:sp>
       <p:sp>
         <p:nvSpPr>
-          <p:cNvPr id="3" name="Content Placeholder 2"/>
-          <p:cNvSpPr>
-            <a:spLocks noGrp="1"/>
-          </p:cNvSpPr>
-          <p:nvPr>
-            <p:ph idx="1"/>
-          </p:nvPr>
-        </p:nvSpPr>
-        <p:spPr/>
-        <p:txBody>
-          <a:bodyPr/>
-          <a:lstStyle/>
-          <a:p>
-            <a:pPr/>
-            <a:r>
-              <a:rPr/>
-              <a:t>Tek komutla ayağa kalkar: docker compose up -d</a:t>
-            </a:r>
-          </a:p>
-        </p:txBody>
-      </p:sp>
-      <p:sp>
-        <p:nvSpPr>
-          <p:cNvPr id="4" name="Rectangle 3"/>
+          <p:cNvPr id="3" name="Rounded Rectangle 2"/>
           <p:cNvSpPr/>
           <p:nvPr/>
         </p:nvSpPr>
         <p:spPr>
           <a:xfrm>
-            <a:off x="548640" y="822960"/>
-            <a:ext cx="1005840" cy="457200"/>
+            <a:off x="502920" y="1325880"/>
+            <a:ext cx="1143000" cy="502920"/>
           </a:xfrm>
-          <a:prstGeom prst="rect">
+          <a:prstGeom prst="roundRect">
             <a:avLst/>
           </a:prstGeom>
           <a:solidFill>
             <a:srgbClr val="1F6FEB"/>
           </a:solidFill>
+          <a:ln>
+            <a:noFill/>
+          </a:ln>
         </p:spPr>
         <p:style>
           <a:lnRef idx="1">
@@ -5012,10 +5859,17 @@
           </a:fontRef>
         </p:style>
         <p:txBody>
-          <a:bodyPr rtlCol="0" anchor="ctr"/>
-          <a:lstStyle/>
-          <a:p>
-            <a:r>
+          <a:bodyPr rtlCol="0" anchor="ctr" wrap="square" lIns="45720" rIns="45720" tIns="22860" bIns="22860"/>
+          <a:lstStyle/>
+          <a:p>
+            <a:pPr algn="ctr"/>
+            <a:r>
+              <a:rPr sz="1200" b="1">
+                <a:solidFill>
+                  <a:srgbClr val="FFFFFF"/>
+                </a:solidFill>
+                <a:latin typeface="Arial"/>
+              </a:rPr>
               <a:t>Client</a:t>
             </a:r>
           </a:p>
@@ -5023,14 +5877,14 @@
       </p:sp>
       <p:sp>
         <p:nvSpPr>
-          <p:cNvPr id="5" name="Chevron 4"/>
+          <p:cNvPr id="4" name="Chevron 3"/>
           <p:cNvSpPr/>
           <p:nvPr/>
         </p:nvSpPr>
         <p:spPr>
           <a:xfrm>
-            <a:off x="1600200" y="896112"/>
-            <a:ext cx="1371600" cy="310896"/>
+            <a:off x="1783080" y="1444752"/>
+            <a:ext cx="1325880" cy="274320"/>
           </a:xfrm>
           <a:prstGeom prst="chevron">
             <a:avLst/>
@@ -5038,6 +5892,9 @@
           <a:solidFill>
             <a:srgbClr val="829AB1"/>
           </a:solidFill>
+          <a:ln>
+            <a:noFill/>
+          </a:ln>
         </p:spPr>
         <p:style>
           <a:lnRef idx="1">
@@ -5054,10 +5911,17 @@
           </a:fontRef>
         </p:style>
         <p:txBody>
-          <a:bodyPr rtlCol="0" anchor="ctr"/>
-          <a:lstStyle/>
-          <a:p>
-            <a:r>
+          <a:bodyPr rtlCol="0" anchor="ctr" wrap="square" lIns="45720" rIns="45720" tIns="22860" bIns="22860"/>
+          <a:lstStyle/>
+          <a:p>
+            <a:pPr algn="ctr"/>
+            <a:r>
+              <a:rPr sz="900" b="1">
+                <a:solidFill>
+                  <a:srgbClr val="0B2545"/>
+                </a:solidFill>
+                <a:latin typeface="Arial"/>
+              </a:rPr>
               <a:t>POST /cargo</a:t>
             </a:r>
           </a:p>
@@ -5065,21 +5929,24 @@
       </p:sp>
       <p:sp>
         <p:nvSpPr>
-          <p:cNvPr id="6" name="Rectangle 5"/>
+          <p:cNvPr id="5" name="Rounded Rectangle 4"/>
           <p:cNvSpPr/>
           <p:nvPr/>
         </p:nvSpPr>
         <p:spPr>
           <a:xfrm>
-            <a:off x="3017520" y="685800"/>
-            <a:ext cx="1554480" cy="731520"/>
+            <a:off x="3246120" y="1188720"/>
+            <a:ext cx="1737360" cy="777240"/>
           </a:xfrm>
-          <a:prstGeom prst="rect">
+          <a:prstGeom prst="roundRect">
             <a:avLst/>
           </a:prstGeom>
           <a:solidFill>
             <a:srgbClr val="1F6FEB"/>
           </a:solidFill>
+          <a:ln>
+            <a:noFill/>
+          </a:ln>
         </p:spPr>
         <p:style>
           <a:lnRef idx="1">
@@ -5096,15 +5963,29 @@
           </a:fontRef>
         </p:style>
         <p:txBody>
-          <a:bodyPr rtlCol="0" anchor="ctr"/>
-          <a:lstStyle/>
-          <a:p>
-            <a:r>
+          <a:bodyPr rtlCol="0" anchor="ctr" wrap="square" lIns="45720" rIns="45720" tIns="22860" bIns="22860"/>
+          <a:lstStyle/>
+          <a:p>
+            <a:pPr algn="ctr"/>
+            <a:r>
+              <a:rPr sz="1200" b="1">
+                <a:solidFill>
+                  <a:srgbClr val="FFFFFF"/>
+                </a:solidFill>
+                <a:latin typeface="Arial"/>
+              </a:rPr>
               <a:t>Flask API</a:t>
             </a:r>
           </a:p>
           <a:p>
-            <a:r>
+            <a:pPr algn="ctr"/>
+            <a:r>
+              <a:rPr sz="1200" b="1">
+                <a:solidFill>
+                  <a:srgbClr val="FFFFFF"/>
+                </a:solidFill>
+                <a:latin typeface="Arial"/>
+              </a:rPr>
               <a:t>:5000</a:t>
             </a:r>
           </a:p>
@@ -5112,21 +5993,24 @@
       </p:sp>
       <p:sp>
         <p:nvSpPr>
-          <p:cNvPr id="7" name="Chevron 6"/>
+          <p:cNvPr id="6" name="Rounded Rectangle 5"/>
           <p:cNvSpPr/>
           <p:nvPr/>
         </p:nvSpPr>
         <p:spPr>
           <a:xfrm>
-            <a:off x="3017520" y="1554480"/>
-            <a:ext cx="3931920" cy="310896"/>
+            <a:off x="502920" y="2377440"/>
+            <a:ext cx="1463040" cy="685800"/>
           </a:xfrm>
-          <a:prstGeom prst="chevron">
+          <a:prstGeom prst="roundRect">
             <a:avLst/>
           </a:prstGeom>
           <a:solidFill>
-            <a:srgbClr val="829AB1"/>
+            <a:srgbClr val="3D5A80"/>
           </a:solidFill>
+          <a:ln>
+            <a:noFill/>
+          </a:ln>
         </p:spPr>
         <p:style>
           <a:lnRef idx="1">
@@ -5143,32 +6027,54 @@
           </a:fontRef>
         </p:style>
         <p:txBody>
-          <a:bodyPr rtlCol="0" anchor="ctr"/>
-          <a:lstStyle/>
-          <a:p>
-            <a:r>
-              <a:t>SQLite + Kafka event</a:t>
-            </a:r>
-          </a:p>
-        </p:txBody>
-      </p:sp>
-      <p:sp>
-        <p:nvSpPr>
-          <p:cNvPr id="8" name="Rectangle 7"/>
+          <a:bodyPr rtlCol="0" anchor="ctr" wrap="square" lIns="45720" rIns="45720" tIns="22860" bIns="22860"/>
+          <a:lstStyle/>
+          <a:p>
+            <a:pPr algn="ctr"/>
+            <a:r>
+              <a:rPr sz="1100" b="1">
+                <a:solidFill>
+                  <a:srgbClr val="FFFFFF"/>
+                </a:solidFill>
+                <a:latin typeface="Arial"/>
+              </a:rPr>
+              <a:t>SQLite</a:t>
+            </a:r>
+          </a:p>
+          <a:p>
+            <a:pPr algn="ctr"/>
+            <a:r>
+              <a:rPr sz="1100" b="1">
+                <a:solidFill>
+                  <a:srgbClr val="FFFFFF"/>
+                </a:solidFill>
+                <a:latin typeface="Arial"/>
+              </a:rPr>
+              <a:t>kargo kaydı</a:t>
+            </a:r>
+          </a:p>
+        </p:txBody>
+      </p:sp>
+      <p:sp>
+        <p:nvSpPr>
+          <p:cNvPr id="7" name="Chevron 6"/>
           <p:cNvSpPr/>
           <p:nvPr/>
         </p:nvSpPr>
         <p:spPr>
           <a:xfrm>
-            <a:off x="3200400" y="1965960"/>
-            <a:ext cx="1554480" cy="822960"/>
+            <a:off x="2011680" y="2514600"/>
+            <a:ext cx="1188720" cy="292608"/>
           </a:xfrm>
-          <a:prstGeom prst="rect">
+          <a:prstGeom prst="chevron">
             <a:avLst/>
           </a:prstGeom>
           <a:solidFill>
-            <a:srgbClr val="0B2545"/>
+            <a:srgbClr val="829AB1"/>
           </a:solidFill>
+          <a:ln>
+            <a:noFill/>
+          </a:ln>
         </p:spPr>
         <p:style>
           <a:lnRef idx="1">
@@ -5185,42 +6091,42 @@
           </a:fontRef>
         </p:style>
         <p:txBody>
-          <a:bodyPr rtlCol="0" anchor="ctr"/>
-          <a:lstStyle/>
-          <a:p>
-            <a:r>
-              <a:t>Kafka</a:t>
-            </a:r>
-          </a:p>
-          <a:p>
-            <a:r>
-              <a:t>cargo-events</a:t>
-            </a:r>
-          </a:p>
-          <a:p>
-            <a:r>
-              <a:t>:9092</a:t>
-            </a:r>
-          </a:p>
-        </p:txBody>
-      </p:sp>
-      <p:sp>
-        <p:nvSpPr>
-          <p:cNvPr id="9" name="Chevron 8"/>
+          <a:bodyPr rtlCol="0" anchor="ctr" wrap="square" lIns="45720" rIns="45720" tIns="22860" bIns="22860"/>
+          <a:lstStyle/>
+          <a:p>
+            <a:pPr algn="ctr"/>
+            <a:r>
+              <a:rPr sz="800" b="1">
+                <a:solidFill>
+                  <a:srgbClr val="0B2545"/>
+                </a:solidFill>
+                <a:latin typeface="Arial"/>
+              </a:rPr>
+              <a:t>kaydeder + event üretir</a:t>
+            </a:r>
+          </a:p>
+        </p:txBody>
+      </p:sp>
+      <p:sp>
+        <p:nvSpPr>
+          <p:cNvPr id="8" name="Rounded Rectangle 7"/>
           <p:cNvSpPr/>
           <p:nvPr/>
         </p:nvSpPr>
         <p:spPr>
           <a:xfrm>
-            <a:off x="3200400" y="2926080"/>
-            <a:ext cx="1554480" cy="310896"/>
+            <a:off x="5577840" y="1188720"/>
+            <a:ext cx="1920240" cy="914400"/>
           </a:xfrm>
-          <a:prstGeom prst="chevron">
+          <a:prstGeom prst="roundRect">
             <a:avLst/>
           </a:prstGeom>
           <a:solidFill>
-            <a:srgbClr val="829AB1"/>
+            <a:srgbClr val="0B2545"/>
           </a:solidFill>
+          <a:ln>
+            <a:noFill/>
+          </a:ln>
         </p:spPr>
         <p:style>
           <a:lnRef idx="1">
@@ -5237,32 +6143,66 @@
           </a:fontRef>
         </p:style>
         <p:txBody>
-          <a:bodyPr rtlCol="0" anchor="ctr"/>
-          <a:lstStyle/>
-          <a:p>
-            <a:r>
-              <a:t>event okunur</a:t>
-            </a:r>
-          </a:p>
-        </p:txBody>
-      </p:sp>
-      <p:sp>
-        <p:nvSpPr>
-          <p:cNvPr id="10" name="Rectangle 9"/>
+          <a:bodyPr rtlCol="0" anchor="ctr" wrap="square" lIns="45720" rIns="45720" tIns="22860" bIns="22860"/>
+          <a:lstStyle/>
+          <a:p>
+            <a:pPr algn="ctr"/>
+            <a:r>
+              <a:rPr sz="1100" b="1">
+                <a:solidFill>
+                  <a:srgbClr val="FFFFFF"/>
+                </a:solidFill>
+                <a:latin typeface="Arial"/>
+              </a:rPr>
+              <a:t>Kafka</a:t>
+            </a:r>
+          </a:p>
+          <a:p>
+            <a:pPr algn="ctr"/>
+            <a:r>
+              <a:rPr sz="1100" b="1">
+                <a:solidFill>
+                  <a:srgbClr val="FFFFFF"/>
+                </a:solidFill>
+                <a:latin typeface="Arial"/>
+              </a:rPr>
+              <a:t>cargo-events</a:t>
+            </a:r>
+          </a:p>
+          <a:p>
+            <a:pPr algn="ctr"/>
+            <a:r>
+              <a:rPr sz="1100" b="1">
+                <a:solidFill>
+                  <a:srgbClr val="FFFFFF"/>
+                </a:solidFill>
+                <a:latin typeface="Arial"/>
+              </a:rPr>
+              <a:t>:9092</a:t>
+            </a:r>
+          </a:p>
+        </p:txBody>
+      </p:sp>
+      <p:sp>
+        <p:nvSpPr>
+          <p:cNvPr id="9" name="Chevron 8"/>
           <p:cNvSpPr/>
           <p:nvPr/>
         </p:nvSpPr>
         <p:spPr>
           <a:xfrm>
-            <a:off x="3200400" y="3337560"/>
-            <a:ext cx="1554480" cy="640080"/>
+            <a:off x="4892040" y="1481328"/>
+            <a:ext cx="640080" cy="274320"/>
           </a:xfrm>
-          <a:prstGeom prst="rect">
+          <a:prstGeom prst="chevron">
             <a:avLst/>
           </a:prstGeom>
           <a:solidFill>
-            <a:srgbClr val="0B2545"/>
+            <a:srgbClr val="829AB1"/>
           </a:solidFill>
+          <a:ln>
+            <a:noFill/>
+          </a:ln>
         </p:spPr>
         <p:style>
           <a:lnRef idx="1">
@@ -5279,30 +6219,32 @@
           </a:fontRef>
         </p:style>
         <p:txBody>
-          <a:bodyPr rtlCol="0" anchor="ctr"/>
-          <a:lstStyle/>
-          <a:p>
-            <a:r>
-              <a:t>Consumer</a:t>
-            </a:r>
-          </a:p>
-          <a:p>
-            <a:r>
-              <a:t>:9091</a:t>
-            </a:r>
-          </a:p>
-        </p:txBody>
-      </p:sp>
-      <p:sp>
-        <p:nvSpPr>
-          <p:cNvPr id="11" name="Chevron 10"/>
+          <a:bodyPr rtlCol="0" anchor="ctr" wrap="square" lIns="45720" rIns="45720" tIns="22860" bIns="22860"/>
+          <a:lstStyle/>
+          <a:p>
+            <a:pPr algn="ctr"/>
+            <a:r>
+              <a:rPr sz="700" b="1">
+                <a:solidFill>
+                  <a:srgbClr val="0B2545"/>
+                </a:solidFill>
+                <a:latin typeface="Arial"/>
+              </a:rPr>
+              <a:t>event gönderir</a:t>
+            </a:r>
+          </a:p>
+        </p:txBody>
+      </p:sp>
+      <p:sp>
+        <p:nvSpPr>
+          <p:cNvPr id="10" name="Chevron 9"/>
           <p:cNvSpPr/>
           <p:nvPr/>
         </p:nvSpPr>
         <p:spPr>
           <a:xfrm>
-            <a:off x="4937760" y="3520440"/>
-            <a:ext cx="1097280" cy="274320"/>
+            <a:off x="6172200" y="2331720"/>
+            <a:ext cx="731520" cy="274320"/>
           </a:xfrm>
           <a:prstGeom prst="chevron">
             <a:avLst/>
@@ -5310,6 +6252,9 @@
           <a:solidFill>
             <a:srgbClr val="829AB1"/>
           </a:solidFill>
+          <a:ln>
+            <a:noFill/>
+          </a:ln>
         </p:spPr>
         <p:style>
           <a:lnRef idx="1">
@@ -5326,32 +6271,42 @@
           </a:fontRef>
         </p:style>
         <p:txBody>
-          <a:bodyPr rtlCol="0" anchor="ctr"/>
-          <a:lstStyle/>
-          <a:p>
-            <a:r>
-              <a:t>/metrics</a:t>
-            </a:r>
-          </a:p>
-        </p:txBody>
-      </p:sp>
-      <p:sp>
-        <p:nvSpPr>
-          <p:cNvPr id="12" name="Rectangle 11"/>
+          <a:bodyPr rtlCol="0" anchor="ctr" wrap="square" lIns="45720" rIns="45720" tIns="22860" bIns="22860"/>
+          <a:lstStyle/>
+          <a:p>
+            <a:pPr algn="ctr"/>
+            <a:r>
+              <a:rPr sz="700" b="1">
+                <a:solidFill>
+                  <a:srgbClr val="0B2545"/>
+                </a:solidFill>
+                <a:latin typeface="Arial"/>
+              </a:rPr>
+              <a:t>event okunur</a:t>
+            </a:r>
+          </a:p>
+        </p:txBody>
+      </p:sp>
+      <p:sp>
+        <p:nvSpPr>
+          <p:cNvPr id="11" name="Rounded Rectangle 10"/>
           <p:cNvSpPr/>
           <p:nvPr/>
         </p:nvSpPr>
         <p:spPr>
           <a:xfrm>
-            <a:off x="6080760" y="3337560"/>
-            <a:ext cx="1463040" cy="640080"/>
+            <a:off x="5577840" y="2788920"/>
+            <a:ext cx="1920240" cy="731520"/>
           </a:xfrm>
-          <a:prstGeom prst="rect">
+          <a:prstGeom prst="roundRect">
             <a:avLst/>
           </a:prstGeom>
           <a:solidFill>
-            <a:srgbClr val="E85D04"/>
+            <a:srgbClr val="0B2545"/>
           </a:solidFill>
+          <a:ln>
+            <a:noFill/>
+          </a:ln>
         </p:spPr>
         <p:style>
           <a:lnRef idx="1">
@@ -5368,30 +6323,44 @@
           </a:fontRef>
         </p:style>
         <p:txBody>
-          <a:bodyPr rtlCol="0" anchor="ctr"/>
-          <a:lstStyle/>
-          <a:p>
-            <a:r>
-              <a:t>Prometheus</a:t>
-            </a:r>
-          </a:p>
-          <a:p>
-            <a:r>
-              <a:t>:9090</a:t>
-            </a:r>
-          </a:p>
-        </p:txBody>
-      </p:sp>
-      <p:sp>
-        <p:nvSpPr>
-          <p:cNvPr id="13" name="Chevron 12"/>
+          <a:bodyPr rtlCol="0" anchor="ctr" wrap="square" lIns="45720" rIns="45720" tIns="22860" bIns="22860"/>
+          <a:lstStyle/>
+          <a:p>
+            <a:pPr algn="ctr"/>
+            <a:r>
+              <a:rPr sz="1200" b="1">
+                <a:solidFill>
+                  <a:srgbClr val="FFFFFF"/>
+                </a:solidFill>
+                <a:latin typeface="Arial"/>
+              </a:rPr>
+              <a:t>Consumer</a:t>
+            </a:r>
+          </a:p>
+          <a:p>
+            <a:pPr algn="ctr"/>
+            <a:r>
+              <a:rPr sz="1200" b="1">
+                <a:solidFill>
+                  <a:srgbClr val="FFFFFF"/>
+                </a:solidFill>
+                <a:latin typeface="Arial"/>
+              </a:rPr>
+              <a:t>:9091</a:t>
+            </a:r>
+          </a:p>
+        </p:txBody>
+      </p:sp>
+      <p:sp>
+        <p:nvSpPr>
+          <p:cNvPr id="12" name="Chevron 11"/>
           <p:cNvSpPr/>
           <p:nvPr/>
         </p:nvSpPr>
         <p:spPr>
           <a:xfrm>
-            <a:off x="6080760" y="2743200"/>
-            <a:ext cx="1463040" cy="274320"/>
+            <a:off x="7635240" y="2999232"/>
+            <a:ext cx="777240" cy="274320"/>
           </a:xfrm>
           <a:prstGeom prst="chevron">
             <a:avLst/>
@@ -5399,6 +6368,9 @@
           <a:solidFill>
             <a:srgbClr val="829AB1"/>
           </a:solidFill>
+          <a:ln>
+            <a:noFill/>
+          </a:ln>
         </p:spPr>
         <p:style>
           <a:lnRef idx="1">
@@ -5415,32 +6387,42 @@
           </a:fontRef>
         </p:style>
         <p:txBody>
-          <a:bodyPr rtlCol="0" anchor="ctr"/>
-          <a:lstStyle/>
-          <a:p>
-            <a:r>
-              <a:t>sorgu</a:t>
-            </a:r>
-          </a:p>
-        </p:txBody>
-      </p:sp>
-      <p:sp>
-        <p:nvSpPr>
-          <p:cNvPr id="14" name="Rectangle 13"/>
+          <a:bodyPr rtlCol="0" anchor="ctr" wrap="square" lIns="45720" rIns="45720" tIns="22860" bIns="22860"/>
+          <a:lstStyle/>
+          <a:p>
+            <a:pPr algn="ctr"/>
+            <a:r>
+              <a:rPr sz="700" b="1">
+                <a:solidFill>
+                  <a:srgbClr val="0B2545"/>
+                </a:solidFill>
+                <a:latin typeface="Arial"/>
+              </a:rPr>
+              <a:t>metrik üretir</a:t>
+            </a:r>
+          </a:p>
+        </p:txBody>
+      </p:sp>
+      <p:sp>
+        <p:nvSpPr>
+          <p:cNvPr id="13" name="Rounded Rectangle 12"/>
           <p:cNvSpPr/>
           <p:nvPr/>
         </p:nvSpPr>
         <p:spPr>
           <a:xfrm>
-            <a:off x="6080760" y="1965960"/>
-            <a:ext cx="1463040" cy="640080"/>
+            <a:off x="8549640" y="2788920"/>
+            <a:ext cx="1828800" cy="731520"/>
           </a:xfrm>
-          <a:prstGeom prst="rect">
+          <a:prstGeom prst="roundRect">
             <a:avLst/>
           </a:prstGeom>
           <a:solidFill>
             <a:srgbClr val="E85D04"/>
           </a:solidFill>
+          <a:ln>
+            <a:noFill/>
+          </a:ln>
         </p:spPr>
         <p:style>
           <a:lnRef idx="1">
@@ -5457,37 +6439,54 @@
           </a:fontRef>
         </p:style>
         <p:txBody>
-          <a:bodyPr rtlCol="0" anchor="ctr"/>
-          <a:lstStyle/>
-          <a:p>
-            <a:r>
-              <a:t>Grafana</a:t>
-            </a:r>
-          </a:p>
-          <a:p>
-            <a:r>
-              <a:t>:3000</a:t>
-            </a:r>
-          </a:p>
-        </p:txBody>
-      </p:sp>
-      <p:sp>
-        <p:nvSpPr>
-          <p:cNvPr id="15" name="Rectangle 14"/>
+          <a:bodyPr rtlCol="0" anchor="ctr" wrap="square" lIns="45720" rIns="45720" tIns="22860" bIns="22860"/>
+          <a:lstStyle/>
+          <a:p>
+            <a:pPr algn="ctr"/>
+            <a:r>
+              <a:rPr sz="1200" b="1">
+                <a:solidFill>
+                  <a:srgbClr val="FFFFFF"/>
+                </a:solidFill>
+                <a:latin typeface="Arial"/>
+              </a:rPr>
+              <a:t>Prometheus</a:t>
+            </a:r>
+          </a:p>
+          <a:p>
+            <a:pPr algn="ctr"/>
+            <a:r>
+              <a:rPr sz="1200" b="1">
+                <a:solidFill>
+                  <a:srgbClr val="FFFFFF"/>
+                </a:solidFill>
+                <a:latin typeface="Arial"/>
+              </a:rPr>
+              <a:t>:9090</a:t>
+            </a:r>
+          </a:p>
+        </p:txBody>
+      </p:sp>
+      <p:sp>
+        <p:nvSpPr>
+          <p:cNvPr id="14" name="Chevron 13"/>
           <p:cNvSpPr/>
           <p:nvPr/>
         </p:nvSpPr>
         <p:spPr>
           <a:xfrm>
-            <a:off x="548640" y="1965960"/>
-            <a:ext cx="1371600" cy="640080"/>
+            <a:off x="8915400" y="2331720"/>
+            <a:ext cx="1097280" cy="274320"/>
           </a:xfrm>
-          <a:prstGeom prst="rect">
+          <a:prstGeom prst="chevron">
             <a:avLst/>
           </a:prstGeom>
           <a:solidFill>
-            <a:srgbClr val="3D5A80"/>
+            <a:srgbClr val="829AB1"/>
           </a:solidFill>
+          <a:ln>
+            <a:noFill/>
+          </a:ln>
         </p:spPr>
         <p:style>
           <a:lnRef idx="1">
@@ -5504,16 +6503,134 @@
           </a:fontRef>
         </p:style>
         <p:txBody>
-          <a:bodyPr rtlCol="0" anchor="ctr"/>
-          <a:lstStyle/>
-          <a:p>
-            <a:r>
-              <a:t>SQLite</a:t>
-            </a:r>
-          </a:p>
-          <a:p>
-            <a:r>
-              <a:t>kargo kaydı</a:t>
+          <a:bodyPr rtlCol="0" anchor="ctr" wrap="square" lIns="45720" rIns="45720" tIns="22860" bIns="22860"/>
+          <a:lstStyle/>
+          <a:p>
+            <a:pPr algn="ctr"/>
+            <a:r>
+              <a:rPr sz="700" b="1">
+                <a:solidFill>
+                  <a:srgbClr val="0B2545"/>
+                </a:solidFill>
+                <a:latin typeface="Arial"/>
+              </a:rPr>
+              <a:t>sorgular</a:t>
+            </a:r>
+          </a:p>
+        </p:txBody>
+      </p:sp>
+      <p:sp>
+        <p:nvSpPr>
+          <p:cNvPr id="15" name="Rounded Rectangle 14"/>
+          <p:cNvSpPr/>
+          <p:nvPr/>
+        </p:nvSpPr>
+        <p:spPr>
+          <a:xfrm>
+            <a:off x="8549640" y="1188720"/>
+            <a:ext cx="1828800" cy="731520"/>
+          </a:xfrm>
+          <a:prstGeom prst="roundRect">
+            <a:avLst/>
+          </a:prstGeom>
+          <a:solidFill>
+            <a:srgbClr val="E85D04"/>
+          </a:solidFill>
+          <a:ln>
+            <a:noFill/>
+          </a:ln>
+        </p:spPr>
+        <p:style>
+          <a:lnRef idx="1">
+            <a:schemeClr val="accent1"/>
+          </a:lnRef>
+          <a:fillRef idx="3">
+            <a:schemeClr val="accent1"/>
+          </a:fillRef>
+          <a:effectRef idx="2">
+            <a:schemeClr val="accent1"/>
+          </a:effectRef>
+          <a:fontRef idx="minor">
+            <a:schemeClr val="lt1"/>
+          </a:fontRef>
+        </p:style>
+        <p:txBody>
+          <a:bodyPr rtlCol="0" anchor="ctr" wrap="square" lIns="45720" rIns="45720" tIns="22860" bIns="22860"/>
+          <a:lstStyle/>
+          <a:p>
+            <a:pPr algn="ctr"/>
+            <a:r>
+              <a:rPr sz="1200" b="1">
+                <a:solidFill>
+                  <a:srgbClr val="FFFFFF"/>
+                </a:solidFill>
+                <a:latin typeface="Arial"/>
+              </a:rPr>
+              <a:t>Grafana</a:t>
+            </a:r>
+          </a:p>
+          <a:p>
+            <a:pPr algn="ctr"/>
+            <a:r>
+              <a:rPr sz="1200" b="1">
+                <a:solidFill>
+                  <a:srgbClr val="FFFFFF"/>
+                </a:solidFill>
+                <a:latin typeface="Arial"/>
+              </a:rPr>
+              <a:t>:3000</a:t>
+            </a:r>
+          </a:p>
+        </p:txBody>
+      </p:sp>
+      <p:sp>
+        <p:nvSpPr>
+          <p:cNvPr id="16" name="Rectangle 15"/>
+          <p:cNvSpPr/>
+          <p:nvPr/>
+        </p:nvSpPr>
+        <p:spPr>
+          <a:xfrm>
+            <a:off x="685800" y="4160520"/>
+            <a:ext cx="10789920" cy="457200"/>
+          </a:xfrm>
+          <a:prstGeom prst="rect">
+            <a:avLst/>
+          </a:prstGeom>
+          <a:solidFill>
+            <a:srgbClr val="F4F6F8"/>
+          </a:solidFill>
+          <a:ln>
+            <a:noFill/>
+          </a:ln>
+        </p:spPr>
+        <p:style>
+          <a:lnRef idx="1">
+            <a:schemeClr val="accent1"/>
+          </a:lnRef>
+          <a:fillRef idx="3">
+            <a:schemeClr val="accent1"/>
+          </a:fillRef>
+          <a:effectRef idx="2">
+            <a:schemeClr val="accent1"/>
+          </a:effectRef>
+          <a:fontRef idx="minor">
+            <a:schemeClr val="lt1"/>
+          </a:fontRef>
+        </p:style>
+        <p:txBody>
+          <a:bodyPr rtlCol="0" anchor="ctr" wrap="square" lIns="45720" rIns="45720" tIns="22860" bIns="22860"/>
+          <a:lstStyle/>
+          <a:p>
+            <a:pPr algn="ctr"/>
+            <a:r>
+              <a:rPr sz="1300" b="1">
+                <a:solidFill>
+                  <a:srgbClr val="0B2545"/>
+                </a:solidFill>
+                <a:latin typeface="Arial"/>
+              </a:rPr>
+              <a:t>tek komutla ayağa kalkar:  docker compose up -d</a:t>
             </a:r>
           </a:p>
         </p:txBody>
@@ -5538,73 +6655,54 @@
       <p:grpSpPr/>
       <p:sp>
         <p:nvSpPr>
-          <p:cNvPr id="2" name="Title 1"/>
-          <p:cNvSpPr>
-            <a:spLocks noGrp="1"/>
-          </p:cNvSpPr>
-          <p:nvPr>
-            <p:ph type="title"/>
-          </p:nvPr>
-        </p:nvSpPr>
-        <p:spPr/>
-        <p:txBody>
-          <a:bodyPr/>
-          <a:lstStyle/>
-          <a:p>
-            <a:r>
+          <p:cNvPr id="2" name="TextBox 1"/>
+          <p:cNvSpPr txBox="1"/>
+          <p:nvPr/>
+        </p:nvSpPr>
+        <p:spPr>
+          <a:xfrm>
+            <a:off x="548640" y="320040"/>
+            <a:ext cx="11064240" cy="731520"/>
+          </a:xfrm>
+          <a:prstGeom prst="rect">
+            <a:avLst/>
+          </a:prstGeom>
+          <a:noFill/>
+        </p:spPr>
+        <p:txBody>
+          <a:bodyPr wrap="square">
+            <a:spAutoFit/>
+          </a:bodyPr>
+          <a:lstStyle/>
+          <a:p>
+            <a:pPr algn="l">
+              <a:lnSpc>
+                <a:spcPct val="100000"/>
+              </a:lnSpc>
+            </a:pPr>
+            <a:r>
+              <a:rPr sz="3000" b="1">
+                <a:solidFill>
+                  <a:srgbClr val="0B2545"/>
+                </a:solidFill>
+                <a:latin typeface="Arial"/>
+              </a:rPr>
               <a:t>REST API ve Durum Makinesi</a:t>
-            </a:r>
-          </a:p>
-        </p:txBody>
-      </p:sp>
-      <p:sp>
-        <p:nvSpPr>
-          <p:cNvPr id="3" name="Content Placeholder 2"/>
-          <p:cNvSpPr>
-            <a:spLocks noGrp="1"/>
-          </p:cNvSpPr>
-          <p:nvPr>
-            <p:ph idx="1"/>
-          </p:nvPr>
-        </p:nvSpPr>
-        <p:spPr/>
-        <p:txBody>
-          <a:bodyPr/>
-          <a:lstStyle/>
-          <a:p>
-            <a:pPr/>
-            <a:r>
-              <a:rPr/>
-              <a:t>CREATED → SHIPPED → IN_TRANSIT → OUT_FOR_DELIVERY → DELIVERED</a:t>
-            </a:r>
-          </a:p>
-          <a:p>
-            <a:pPr/>
-            <a:r>
-              <a:rPr/>
-              <a:t>DELIVERED ve CANCELLED terminal durumdur: tekrar değiştirilemez, API 400 döner</a:t>
-            </a:r>
-          </a:p>
-          <a:p>
-            <a:pPr/>
-            <a:r>
-              <a:rPr/>
-              <a:t>Bu kural teslim edilmiş kargonun yeniden yola çıkmasını engeller</a:t>
             </a:r>
           </a:p>
         </p:txBody>
       </p:sp>
       <p:graphicFrame>
         <p:nvGraphicFramePr>
-          <p:cNvPr id="4" name="Table 3"/>
+          <p:cNvPr id="3" name="Table 2"/>
           <p:cNvGraphicFramePr>
             <a:graphicFrameLocks noGrp="1"/>
           </p:cNvGraphicFramePr>
           <p:nvPr/>
         </p:nvGraphicFramePr>
         <p:xfrm>
-          <a:off x="914400" y="1828800"/>
-          <a:ext cx="5486400" cy="1828800"/>
+          <a:off x="685800" y="1325880"/>
+          <a:ext cx="10789918" cy="1755648"/>
         </p:xfrm>
         <a:graphic>
           <a:graphicData uri="http://schemas.openxmlformats.org/drawingml/2006/table">
@@ -5613,23 +6711,33 @@
                 <a:tableStyleId>{5C22544A-7EE6-4342-B048-85BDC9FD1C3A}</a:tableStyleId>
               </a:tblPr>
               <a:tblGrid>
-                <a:gridCol w="1371600"/>
-                <a:gridCol w="1371600"/>
-                <a:gridCol w="1371600"/>
-                <a:gridCol w="1371600"/>
+                <a:gridCol w="1624289"/>
+                <a:gridCol w="3480619"/>
+                <a:gridCol w="3944701"/>
+                <a:gridCol w="1740309"/>
               </a:tblGrid>
-              <a:tr h="304800">
+              <a:tr h="292608">
                 <a:tc>
                   <a:txBody>
                     <a:bodyPr/>
                     <a:lstStyle/>
                     <a:p>
                       <a:r>
+                        <a:rPr sz="1100" b="1">
+                          <a:solidFill>
+                            <a:srgbClr val="FFFFFF"/>
+                          </a:solidFill>
+                          <a:latin typeface="Arial"/>
+                        </a:rPr>
                         <a:t>Metot</a:t>
                       </a:r>
                     </a:p>
                   </a:txBody>
-                  <a:tcPr/>
+                  <a:tcPr marL="64008" marR="64008" marT="27432" marB="27432" anchor="ctr">
+                    <a:solidFill>
+                      <a:srgbClr val="1F6FEB"/>
+                    </a:solidFill>
+                  </a:tcPr>
                 </a:tc>
                 <a:tc>
                   <a:txBody>
@@ -5637,11 +6745,21 @@
                     <a:lstStyle/>
                     <a:p>
                       <a:r>
+                        <a:rPr sz="1100" b="1">
+                          <a:solidFill>
+                            <a:srgbClr val="FFFFFF"/>
+                          </a:solidFill>
+                          <a:latin typeface="Arial"/>
+                        </a:rPr>
                         <a:t>Yol</a:t>
                       </a:r>
                     </a:p>
                   </a:txBody>
-                  <a:tcPr/>
+                  <a:tcPr marL="64008" marR="64008" marT="27432" marB="27432" anchor="ctr">
+                    <a:solidFill>
+                      <a:srgbClr val="1F6FEB"/>
+                    </a:solidFill>
+                  </a:tcPr>
                 </a:tc>
                 <a:tc>
                   <a:txBody>
@@ -5649,11 +6767,21 @@
                     <a:lstStyle/>
                     <a:p>
                       <a:r>
+                        <a:rPr sz="1100" b="1">
+                          <a:solidFill>
+                            <a:srgbClr val="FFFFFF"/>
+                          </a:solidFill>
+                          <a:latin typeface="Arial"/>
+                        </a:rPr>
                         <a:t>İşlev</a:t>
                       </a:r>
                     </a:p>
                   </a:txBody>
-                  <a:tcPr/>
+                  <a:tcPr marL="64008" marR="64008" marT="27432" marB="27432" anchor="ctr">
+                    <a:solidFill>
+                      <a:srgbClr val="1F6FEB"/>
+                    </a:solidFill>
+                  </a:tcPr>
                 </a:tc>
                 <a:tc>
                   <a:txBody>
@@ -5661,25 +6789,45 @@
                     <a:lstStyle/>
                     <a:p>
                       <a:r>
+                        <a:rPr sz="1100" b="1">
+                          <a:solidFill>
+                            <a:srgbClr val="FFFFFF"/>
+                          </a:solidFill>
+                          <a:latin typeface="Arial"/>
+                        </a:rPr>
                         <a:t>Yanıt</a:t>
                       </a:r>
                     </a:p>
                   </a:txBody>
-                  <a:tcPr/>
+                  <a:tcPr marL="64008" marR="64008" marT="27432" marB="27432" anchor="ctr">
+                    <a:solidFill>
+                      <a:srgbClr val="1F6FEB"/>
+                    </a:solidFill>
+                  </a:tcPr>
                 </a:tc>
               </a:tr>
-              <a:tr h="304800">
+              <a:tr h="292608">
                 <a:tc>
                   <a:txBody>
                     <a:bodyPr/>
                     <a:lstStyle/>
                     <a:p>
                       <a:r>
+                        <a:rPr sz="1100" b="0">
+                          <a:solidFill>
+                            <a:srgbClr val="0B2545"/>
+                          </a:solidFill>
+                          <a:latin typeface="Arial"/>
+                        </a:rPr>
                         <a:t>POST</a:t>
                       </a:r>
                     </a:p>
                   </a:txBody>
-                  <a:tcPr/>
+                  <a:tcPr marL="64008" marR="64008" marT="27432" marB="27432" anchor="ctr">
+                    <a:solidFill>
+                      <a:srgbClr val="FFFFFF"/>
+                    </a:solidFill>
+                  </a:tcPr>
                 </a:tc>
                 <a:tc>
                   <a:txBody>
@@ -5687,11 +6835,21 @@
                     <a:lstStyle/>
                     <a:p>
                       <a:r>
+                        <a:rPr sz="1100" b="0">
+                          <a:solidFill>
+                            <a:srgbClr val="0B2545"/>
+                          </a:solidFill>
+                          <a:latin typeface="Arial"/>
+                        </a:rPr>
                         <a:t>/cargo</a:t>
                       </a:r>
                     </a:p>
                   </a:txBody>
-                  <a:tcPr/>
+                  <a:tcPr marL="64008" marR="64008" marT="27432" marB="27432" anchor="ctr">
+                    <a:solidFill>
+                      <a:srgbClr val="FFFFFF"/>
+                    </a:solidFill>
+                  </a:tcPr>
                 </a:tc>
                 <a:tc>
                   <a:txBody>
@@ -5699,11 +6857,21 @@
                     <a:lstStyle/>
                     <a:p>
                       <a:r>
+                        <a:rPr sz="1100" b="0">
+                          <a:solidFill>
+                            <a:srgbClr val="0B2545"/>
+                          </a:solidFill>
+                          <a:latin typeface="Arial"/>
+                        </a:rPr>
                         <a:t>Kargo oluştur</a:t>
                       </a:r>
                     </a:p>
                   </a:txBody>
-                  <a:tcPr/>
+                  <a:tcPr marL="64008" marR="64008" marT="27432" marB="27432" anchor="ctr">
+                    <a:solidFill>
+                      <a:srgbClr val="FFFFFF"/>
+                    </a:solidFill>
+                  </a:tcPr>
                 </a:tc>
                 <a:tc>
                   <a:txBody>
@@ -5711,25 +6879,45 @@
                     <a:lstStyle/>
                     <a:p>
                       <a:r>
+                        <a:rPr sz="1100" b="0">
+                          <a:solidFill>
+                            <a:srgbClr val="0B2545"/>
+                          </a:solidFill>
+                          <a:latin typeface="Arial"/>
+                        </a:rPr>
                         <a:t>201</a:t>
                       </a:r>
                     </a:p>
                   </a:txBody>
-                  <a:tcPr/>
+                  <a:tcPr marL="64008" marR="64008" marT="27432" marB="27432" anchor="ctr">
+                    <a:solidFill>
+                      <a:srgbClr val="FFFFFF"/>
+                    </a:solidFill>
+                  </a:tcPr>
                 </a:tc>
               </a:tr>
-              <a:tr h="304800">
+              <a:tr h="292608">
                 <a:tc>
                   <a:txBody>
                     <a:bodyPr/>
                     <a:lstStyle/>
                     <a:p>
                       <a:r>
+                        <a:rPr sz="1100" b="0">
+                          <a:solidFill>
+                            <a:srgbClr val="0B2545"/>
+                          </a:solidFill>
+                          <a:latin typeface="Arial"/>
+                        </a:rPr>
                         <a:t>GET</a:t>
                       </a:r>
                     </a:p>
                   </a:txBody>
-                  <a:tcPr/>
+                  <a:tcPr marL="64008" marR="64008" marT="27432" marB="27432" anchor="ctr">
+                    <a:solidFill>
+                      <a:srgbClr val="F4F6F8"/>
+                    </a:solidFill>
+                  </a:tcPr>
                 </a:tc>
                 <a:tc>
                   <a:txBody>
@@ -5737,11 +6925,21 @@
                     <a:lstStyle/>
                     <a:p>
                       <a:r>
+                        <a:rPr sz="1100" b="0">
+                          <a:solidFill>
+                            <a:srgbClr val="0B2545"/>
+                          </a:solidFill>
+                          <a:latin typeface="Arial"/>
+                        </a:rPr>
                         <a:t>/cargo</a:t>
                       </a:r>
                     </a:p>
                   </a:txBody>
-                  <a:tcPr/>
+                  <a:tcPr marL="64008" marR="64008" marT="27432" marB="27432" anchor="ctr">
+                    <a:solidFill>
+                      <a:srgbClr val="F4F6F8"/>
+                    </a:solidFill>
+                  </a:tcPr>
                 </a:tc>
                 <a:tc>
                   <a:txBody>
@@ -5749,11 +6947,21 @@
                     <a:lstStyle/>
                     <a:p>
                       <a:r>
+                        <a:rPr sz="1100" b="0">
+                          <a:solidFill>
+                            <a:srgbClr val="0B2545"/>
+                          </a:solidFill>
+                          <a:latin typeface="Arial"/>
+                        </a:rPr>
                         <a:t>Listele + filtrele</a:t>
                       </a:r>
                     </a:p>
                   </a:txBody>
-                  <a:tcPr/>
+                  <a:tcPr marL="64008" marR="64008" marT="27432" marB="27432" anchor="ctr">
+                    <a:solidFill>
+                      <a:srgbClr val="F4F6F8"/>
+                    </a:solidFill>
+                  </a:tcPr>
                 </a:tc>
                 <a:tc>
                   <a:txBody>
@@ -5761,25 +6969,45 @@
                     <a:lstStyle/>
                     <a:p>
                       <a:r>
+                        <a:rPr sz="1100" b="0">
+                          <a:solidFill>
+                            <a:srgbClr val="0B2545"/>
+                          </a:solidFill>
+                          <a:latin typeface="Arial"/>
+                        </a:rPr>
                         <a:t>200</a:t>
                       </a:r>
                     </a:p>
                   </a:txBody>
-                  <a:tcPr/>
+                  <a:tcPr marL="64008" marR="64008" marT="27432" marB="27432" anchor="ctr">
+                    <a:solidFill>
+                      <a:srgbClr val="F4F6F8"/>
+                    </a:solidFill>
+                  </a:tcPr>
                 </a:tc>
               </a:tr>
-              <a:tr h="304800">
+              <a:tr h="292608">
                 <a:tc>
                   <a:txBody>
                     <a:bodyPr/>
                     <a:lstStyle/>
                     <a:p>
                       <a:r>
+                        <a:rPr sz="1100" b="0">
+                          <a:solidFill>
+                            <a:srgbClr val="0B2545"/>
+                          </a:solidFill>
+                          <a:latin typeface="Arial"/>
+                        </a:rPr>
                         <a:t>GET</a:t>
                       </a:r>
                     </a:p>
                   </a:txBody>
-                  <a:tcPr/>
+                  <a:tcPr marL="64008" marR="64008" marT="27432" marB="27432" anchor="ctr">
+                    <a:solidFill>
+                      <a:srgbClr val="FFFFFF"/>
+                    </a:solidFill>
+                  </a:tcPr>
                 </a:tc>
                 <a:tc>
                   <a:txBody>
@@ -5787,11 +7015,21 @@
                     <a:lstStyle/>
                     <a:p>
                       <a:r>
+                        <a:rPr sz="1100" b="0">
+                          <a:solidFill>
+                            <a:srgbClr val="0B2545"/>
+                          </a:solidFill>
+                          <a:latin typeface="Arial"/>
+                        </a:rPr>
                         <a:t>/cargo/&lt;id&gt;</a:t>
                       </a:r>
                     </a:p>
                   </a:txBody>
-                  <a:tcPr/>
+                  <a:tcPr marL="64008" marR="64008" marT="27432" marB="27432" anchor="ctr">
+                    <a:solidFill>
+                      <a:srgbClr val="FFFFFF"/>
+                    </a:solidFill>
+                  </a:tcPr>
                 </a:tc>
                 <a:tc>
                   <a:txBody>
@@ -5799,11 +7037,21 @@
                     <a:lstStyle/>
                     <a:p>
                       <a:r>
+                        <a:rPr sz="1100" b="0">
+                          <a:solidFill>
+                            <a:srgbClr val="0B2545"/>
+                          </a:solidFill>
+                          <a:latin typeface="Arial"/>
+                        </a:rPr>
                         <a:t>Tek kargo</a:t>
                       </a:r>
                     </a:p>
                   </a:txBody>
-                  <a:tcPr/>
+                  <a:tcPr marL="64008" marR="64008" marT="27432" marB="27432" anchor="ctr">
+                    <a:solidFill>
+                      <a:srgbClr val="FFFFFF"/>
+                    </a:solidFill>
+                  </a:tcPr>
                 </a:tc>
                 <a:tc>
                   <a:txBody>
@@ -5811,25 +7059,45 @@
                     <a:lstStyle/>
                     <a:p>
                       <a:r>
+                        <a:rPr sz="1100" b="0">
+                          <a:solidFill>
+                            <a:srgbClr val="0B2545"/>
+                          </a:solidFill>
+                          <a:latin typeface="Arial"/>
+                        </a:rPr>
                         <a:t>404</a:t>
                       </a:r>
                     </a:p>
                   </a:txBody>
-                  <a:tcPr/>
+                  <a:tcPr marL="64008" marR="64008" marT="27432" marB="27432" anchor="ctr">
+                    <a:solidFill>
+                      <a:srgbClr val="FFFFFF"/>
+                    </a:solidFill>
+                  </a:tcPr>
                 </a:tc>
               </a:tr>
-              <a:tr h="304800">
+              <a:tr h="292608">
                 <a:tc>
                   <a:txBody>
                     <a:bodyPr/>
                     <a:lstStyle/>
                     <a:p>
                       <a:r>
+                        <a:rPr sz="1100" b="0">
+                          <a:solidFill>
+                            <a:srgbClr val="0B2545"/>
+                          </a:solidFill>
+                          <a:latin typeface="Arial"/>
+                        </a:rPr>
                         <a:t>PUT</a:t>
                       </a:r>
                     </a:p>
                   </a:txBody>
-                  <a:tcPr/>
+                  <a:tcPr marL="64008" marR="64008" marT="27432" marB="27432" anchor="ctr">
+                    <a:solidFill>
+                      <a:srgbClr val="F4F6F8"/>
+                    </a:solidFill>
+                  </a:tcPr>
                 </a:tc>
                 <a:tc>
                   <a:txBody>
@@ -5837,11 +7105,21 @@
                     <a:lstStyle/>
                     <a:p>
                       <a:r>
+                        <a:rPr sz="1100" b="0">
+                          <a:solidFill>
+                            <a:srgbClr val="0B2545"/>
+                          </a:solidFill>
+                          <a:latin typeface="Arial"/>
+                        </a:rPr>
                         <a:t>/cargo/&lt;id&gt;/status</a:t>
                       </a:r>
                     </a:p>
                   </a:txBody>
-                  <a:tcPr/>
+                  <a:tcPr marL="64008" marR="64008" marT="27432" marB="27432" anchor="ctr">
+                    <a:solidFill>
+                      <a:srgbClr val="F4F6F8"/>
+                    </a:solidFill>
+                  </a:tcPr>
                 </a:tc>
                 <a:tc>
                   <a:txBody>
@@ -5849,11 +7127,21 @@
                     <a:lstStyle/>
                     <a:p>
                       <a:r>
+                        <a:rPr sz="1100" b="0">
+                          <a:solidFill>
+                            <a:srgbClr val="0B2545"/>
+                          </a:solidFill>
+                          <a:latin typeface="Arial"/>
+                        </a:rPr>
                         <a:t>Durum değiştir</a:t>
                       </a:r>
                     </a:p>
                   </a:txBody>
-                  <a:tcPr/>
+                  <a:tcPr marL="64008" marR="64008" marT="27432" marB="27432" anchor="ctr">
+                    <a:solidFill>
+                      <a:srgbClr val="F4F6F8"/>
+                    </a:solidFill>
+                  </a:tcPr>
                 </a:tc>
                 <a:tc>
                   <a:txBody>
@@ -5861,25 +7149,45 @@
                     <a:lstStyle/>
                     <a:p>
                       <a:r>
+                        <a:rPr sz="1100" b="0">
+                          <a:solidFill>
+                            <a:srgbClr val="0B2545"/>
+                          </a:solidFill>
+                          <a:latin typeface="Arial"/>
+                        </a:rPr>
                         <a:t>200/400</a:t>
                       </a:r>
                     </a:p>
                   </a:txBody>
-                  <a:tcPr/>
+                  <a:tcPr marL="64008" marR="64008" marT="27432" marB="27432" anchor="ctr">
+                    <a:solidFill>
+                      <a:srgbClr val="F4F6F8"/>
+                    </a:solidFill>
+                  </a:tcPr>
                 </a:tc>
               </a:tr>
-              <a:tr h="304800">
+              <a:tr h="292608">
                 <a:tc>
                   <a:txBody>
                     <a:bodyPr/>
                     <a:lstStyle/>
                     <a:p>
                       <a:r>
+                        <a:rPr sz="1100" b="0">
+                          <a:solidFill>
+                            <a:srgbClr val="0B2545"/>
+                          </a:solidFill>
+                          <a:latin typeface="Arial"/>
+                        </a:rPr>
                         <a:t>DELETE</a:t>
                       </a:r>
                     </a:p>
                   </a:txBody>
-                  <a:tcPr/>
+                  <a:tcPr marL="64008" marR="64008" marT="27432" marB="27432" anchor="ctr">
+                    <a:solidFill>
+                      <a:srgbClr val="FFFFFF"/>
+                    </a:solidFill>
+                  </a:tcPr>
                 </a:tc>
                 <a:tc>
                   <a:txBody>
@@ -5887,11 +7195,21 @@
                     <a:lstStyle/>
                     <a:p>
                       <a:r>
+                        <a:rPr sz="1100" b="0">
+                          <a:solidFill>
+                            <a:srgbClr val="0B2545"/>
+                          </a:solidFill>
+                          <a:latin typeface="Arial"/>
+                        </a:rPr>
                         <a:t>/cargo/&lt;id&gt;</a:t>
                       </a:r>
                     </a:p>
                   </a:txBody>
-                  <a:tcPr/>
+                  <a:tcPr marL="64008" marR="64008" marT="27432" marB="27432" anchor="ctr">
+                    <a:solidFill>
+                      <a:srgbClr val="FFFFFF"/>
+                    </a:solidFill>
+                  </a:tcPr>
                 </a:tc>
                 <a:tc>
                   <a:txBody>
@@ -5899,11 +7217,21 @@
                     <a:lstStyle/>
                     <a:p>
                       <a:r>
+                        <a:rPr sz="1100" b="0">
+                          <a:solidFill>
+                            <a:srgbClr val="0B2545"/>
+                          </a:solidFill>
+                          <a:latin typeface="Arial"/>
+                        </a:rPr>
                         <a:t>Sil</a:t>
                       </a:r>
                     </a:p>
                   </a:txBody>
-                  <a:tcPr/>
+                  <a:tcPr marL="64008" marR="64008" marT="27432" marB="27432" anchor="ctr">
+                    <a:solidFill>
+                      <a:srgbClr val="FFFFFF"/>
+                    </a:solidFill>
+                  </a:tcPr>
                 </a:tc>
                 <a:tc>
                   <a:txBody>
@@ -5911,17 +7239,209 @@
                     <a:lstStyle/>
                     <a:p>
                       <a:r>
+                        <a:rPr sz="1100" b="0">
+                          <a:solidFill>
+                            <a:srgbClr val="0B2545"/>
+                          </a:solidFill>
+                          <a:latin typeface="Arial"/>
+                        </a:rPr>
                         <a:t>200/404</a:t>
                       </a:r>
                     </a:p>
                   </a:txBody>
-                  <a:tcPr/>
+                  <a:tcPr marL="64008" marR="64008" marT="27432" marB="27432" anchor="ctr">
+                    <a:solidFill>
+                      <a:srgbClr val="FFFFFF"/>
+                    </a:solidFill>
+                  </a:tcPr>
                 </a:tc>
               </a:tr>
             </a:tbl>
           </a:graphicData>
         </a:graphic>
       </p:graphicFrame>
+      <p:sp>
+        <p:nvSpPr>
+          <p:cNvPr id="4" name="TextBox 3"/>
+          <p:cNvSpPr txBox="1"/>
+          <p:nvPr/>
+        </p:nvSpPr>
+        <p:spPr>
+          <a:xfrm>
+            <a:off x="685800" y="3520440"/>
+            <a:ext cx="10789920" cy="320040"/>
+          </a:xfrm>
+          <a:prstGeom prst="rect">
+            <a:avLst/>
+          </a:prstGeom>
+          <a:noFill/>
+        </p:spPr>
+        <p:txBody>
+          <a:bodyPr wrap="square">
+            <a:spAutoFit/>
+          </a:bodyPr>
+          <a:lstStyle/>
+          <a:p>
+            <a:pPr algn="l">
+              <a:lnSpc>
+                <a:spcPct val="100000"/>
+              </a:lnSpc>
+            </a:pPr>
+            <a:r>
+              <a:rPr sz="1500" b="1">
+                <a:solidFill>
+                  <a:srgbClr val="1F6FEB"/>
+                </a:solidFill>
+                <a:latin typeface="Arial"/>
+              </a:rPr>
+              <a:t>Durum akışı</a:t>
+            </a:r>
+          </a:p>
+        </p:txBody>
+      </p:sp>
+      <p:sp>
+        <p:nvSpPr>
+          <p:cNvPr id="5" name="Rectangle 4"/>
+          <p:cNvSpPr/>
+          <p:nvPr/>
+        </p:nvSpPr>
+        <p:spPr>
+          <a:xfrm>
+            <a:off x="685800" y="3931920"/>
+            <a:ext cx="10789920" cy="502920"/>
+          </a:xfrm>
+          <a:prstGeom prst="rect">
+            <a:avLst/>
+          </a:prstGeom>
+          <a:solidFill>
+            <a:srgbClr val="F4F6F8"/>
+          </a:solidFill>
+          <a:ln>
+            <a:noFill/>
+          </a:ln>
+        </p:spPr>
+        <p:style>
+          <a:lnRef idx="1">
+            <a:schemeClr val="accent1"/>
+          </a:lnRef>
+          <a:fillRef idx="3">
+            <a:schemeClr val="accent1"/>
+          </a:fillRef>
+          <a:effectRef idx="2">
+            <a:schemeClr val="accent1"/>
+          </a:effectRef>
+          <a:fontRef idx="minor">
+            <a:schemeClr val="lt1"/>
+          </a:fontRef>
+        </p:style>
+        <p:txBody>
+          <a:bodyPr rtlCol="0" anchor="ctr" wrap="square" lIns="45720" rIns="45720" tIns="22860" bIns="22860"/>
+          <a:lstStyle/>
+          <a:p>
+            <a:pPr algn="ctr"/>
+            <a:r>
+              <a:rPr sz="1300" b="1">
+                <a:solidFill>
+                  <a:srgbClr val="0B2545"/>
+                </a:solidFill>
+                <a:latin typeface="Arial"/>
+              </a:rPr>
+              <a:t>CREATED  →  SHIPPED  →  IN_TRANSIT  →  OUT_FOR_DELIVERY  →  DELIVERED</a:t>
+            </a:r>
+          </a:p>
+        </p:txBody>
+      </p:sp>
+      <p:sp>
+        <p:nvSpPr>
+          <p:cNvPr id="6" name="Rectangle 5"/>
+          <p:cNvSpPr/>
+          <p:nvPr/>
+        </p:nvSpPr>
+        <p:spPr>
+          <a:xfrm>
+            <a:off x="685800" y="4663440"/>
+            <a:ext cx="10789920" cy="502920"/>
+          </a:xfrm>
+          <a:prstGeom prst="rect">
+            <a:avLst/>
+          </a:prstGeom>
+          <a:solidFill>
+            <a:srgbClr val="E85D04"/>
+          </a:solidFill>
+          <a:ln>
+            <a:noFill/>
+          </a:ln>
+        </p:spPr>
+        <p:style>
+          <a:lnRef idx="1">
+            <a:schemeClr val="accent1"/>
+          </a:lnRef>
+          <a:fillRef idx="3">
+            <a:schemeClr val="accent1"/>
+          </a:fillRef>
+          <a:effectRef idx="2">
+            <a:schemeClr val="accent1"/>
+          </a:effectRef>
+          <a:fontRef idx="minor">
+            <a:schemeClr val="lt1"/>
+          </a:fontRef>
+        </p:style>
+        <p:txBody>
+          <a:bodyPr rtlCol="0" anchor="ctr" wrap="square" lIns="45720" rIns="45720" tIns="22860" bIns="22860"/>
+          <a:lstStyle/>
+          <a:p>
+            <a:pPr algn="ctr"/>
+            <a:r>
+              <a:rPr sz="1300" b="1">
+                <a:solidFill>
+                  <a:srgbClr val="FFFFFF"/>
+                </a:solidFill>
+                <a:latin typeface="Arial"/>
+              </a:rPr>
+              <a:t>DELIVERED ve CANCELLED terminal durumdur — tekrar değiştirilemez, API 400 döner</a:t>
+            </a:r>
+          </a:p>
+        </p:txBody>
+      </p:sp>
+      <p:sp>
+        <p:nvSpPr>
+          <p:cNvPr id="7" name="TextBox 6"/>
+          <p:cNvSpPr txBox="1"/>
+          <p:nvPr/>
+        </p:nvSpPr>
+        <p:spPr>
+          <a:xfrm>
+            <a:off x="685800" y="5349240"/>
+            <a:ext cx="10789920" cy="365760"/>
+          </a:xfrm>
+          <a:prstGeom prst="rect">
+            <a:avLst/>
+          </a:prstGeom>
+          <a:noFill/>
+        </p:spPr>
+        <p:txBody>
+          <a:bodyPr wrap="square">
+            <a:spAutoFit/>
+          </a:bodyPr>
+          <a:lstStyle/>
+          <a:p>
+            <a:pPr algn="l">
+              <a:lnSpc>
+                <a:spcPct val="100000"/>
+              </a:lnSpc>
+            </a:pPr>
+            <a:r>
+              <a:rPr sz="1200" b="0">
+                <a:solidFill>
+                  <a:srgbClr val="606B7A"/>
+                </a:solidFill>
+                <a:latin typeface="Arial"/>
+              </a:rPr>
+              <a:t>Bu kural teslim edilmiş bir kargonun yeniden yola çıkmasını engeller (app/models.py → TERMINAL_STATUSES, testlerle doğrulanmış)</a:t>
+            </a:r>
+          </a:p>
+        </p:txBody>
+      </p:sp>
     </p:spTree>
   </p:cSld>
   <p:clrMapOvr>
@@ -5942,79 +7462,432 @@
       <p:grpSpPr/>
       <p:sp>
         <p:nvSpPr>
-          <p:cNvPr id="2" name="Title 1"/>
-          <p:cNvSpPr>
-            <a:spLocks noGrp="1"/>
-          </p:cNvSpPr>
-          <p:nvPr>
-            <p:ph type="title"/>
-          </p:nvPr>
-        </p:nvSpPr>
-        <p:spPr/>
-        <p:txBody>
-          <a:bodyPr/>
-          <a:lstStyle/>
-          <a:p>
-            <a:r>
+          <p:cNvPr id="2" name="TextBox 1"/>
+          <p:cNvSpPr txBox="1"/>
+          <p:nvPr/>
+        </p:nvSpPr>
+        <p:spPr>
+          <a:xfrm>
+            <a:off x="548640" y="320040"/>
+            <a:ext cx="11064240" cy="731520"/>
+          </a:xfrm>
+          <a:prstGeom prst="rect">
+            <a:avLst/>
+          </a:prstGeom>
+          <a:noFill/>
+        </p:spPr>
+        <p:txBody>
+          <a:bodyPr wrap="square">
+            <a:spAutoFit/>
+          </a:bodyPr>
+          <a:lstStyle/>
+          <a:p>
+            <a:pPr algn="l">
+              <a:lnSpc>
+                <a:spcPct val="100000"/>
+              </a:lnSpc>
+            </a:pPr>
+            <a:r>
+              <a:rPr sz="3000" b="1">
+                <a:solidFill>
+                  <a:srgbClr val="0B2545"/>
+                </a:solidFill>
+                <a:latin typeface="Arial"/>
+              </a:rPr>
               <a:t>Kafka Producer: 5 Olay Tipi</a:t>
             </a:r>
           </a:p>
         </p:txBody>
       </p:sp>
-      <p:sp>
-        <p:nvSpPr>
-          <p:cNvPr id="3" name="Content Placeholder 2"/>
-          <p:cNvSpPr>
-            <a:spLocks noGrp="1"/>
-          </p:cNvSpPr>
-          <p:nvPr>
-            <p:ph idx="1"/>
-          </p:nvPr>
-        </p:nvSpPr>
-        <p:spPr/>
-        <p:txBody>
-          <a:bodyPr/>
-          <a:lstStyle/>
-          <a:p>
-            <a:pPr/>
-            <a:r>
-              <a:rPr/>
-              <a:t>cargo.created — kargo oluşturuldu</a:t>
-            </a:r>
-          </a:p>
-          <a:p>
-            <a:pPr/>
-            <a:r>
-              <a:rPr/>
-              <a:t>cargo.status_changed — durum değişti</a:t>
-            </a:r>
-          </a:p>
-          <a:p>
-            <a:pPr/>
-            <a:r>
-              <a:rPr/>
-              <a:t>cargo.delivered — teslim edildi</a:t>
-            </a:r>
-          </a:p>
-          <a:p>
-            <a:pPr/>
-            <a:r>
-              <a:rPr/>
-              <a:t>cargo.cancelled — iptal edildi</a:t>
-            </a:r>
-          </a:p>
-          <a:p>
-            <a:pPr/>
-            <a:r>
-              <a:rPr/>
-              <a:t>cargo.deleted — silindi</a:t>
-            </a:r>
-          </a:p>
-          <a:p>
-            <a:pPr/>
-            <a:r>
-              <a:rPr/>
-              <a:t>cargo_id mesaj anahtarı (key) olarak kullanılır → aynı kargonun event'leri aynı partition'a düşer, sıralama korunur</a:t>
+      <p:graphicFrame>
+        <p:nvGraphicFramePr>
+          <p:cNvPr id="3" name="Table 2"/>
+          <p:cNvGraphicFramePr>
+            <a:graphicFrameLocks noGrp="1"/>
+          </p:cNvGraphicFramePr>
+          <p:nvPr/>
+        </p:nvGraphicFramePr>
+        <p:xfrm>
+          <a:off x="685800" y="1325880"/>
+          <a:ext cx="10789919" cy="1755648"/>
+        </p:xfrm>
+        <a:graphic>
+          <a:graphicData uri="http://schemas.openxmlformats.org/drawingml/2006/table">
+            <a:tbl>
+              <a:tblPr firstRow="1" bandRow="1">
+                <a:tableStyleId>{5C22544A-7EE6-4342-B048-85BDC9FD1C3A}</a:tableStyleId>
+              </a:tblPr>
+              <a:tblGrid>
+                <a:gridCol w="3902737"/>
+                <a:gridCol w="6887182"/>
+              </a:tblGrid>
+              <a:tr h="292608">
+                <a:tc>
+                  <a:txBody>
+                    <a:bodyPr/>
+                    <a:lstStyle/>
+                    <a:p>
+                      <a:r>
+                        <a:rPr sz="1100" b="1">
+                          <a:solidFill>
+                            <a:srgbClr val="FFFFFF"/>
+                          </a:solidFill>
+                          <a:latin typeface="Arial"/>
+                        </a:rPr>
+                        <a:t>Event</a:t>
+                      </a:r>
+                    </a:p>
+                  </a:txBody>
+                  <a:tcPr marL="64008" marR="64008" marT="27432" marB="27432" anchor="ctr">
+                    <a:solidFill>
+                      <a:srgbClr val="1F6FEB"/>
+                    </a:solidFill>
+                  </a:tcPr>
+                </a:tc>
+                <a:tc>
+                  <a:txBody>
+                    <a:bodyPr/>
+                    <a:lstStyle/>
+                    <a:p>
+                      <a:r>
+                        <a:rPr sz="1100" b="1">
+                          <a:solidFill>
+                            <a:srgbClr val="FFFFFF"/>
+                          </a:solidFill>
+                          <a:latin typeface="Arial"/>
+                        </a:rPr>
+                        <a:t>Ne zaman gönderilir</a:t>
+                      </a:r>
+                    </a:p>
+                  </a:txBody>
+                  <a:tcPr marL="64008" marR="64008" marT="27432" marB="27432" anchor="ctr">
+                    <a:solidFill>
+                      <a:srgbClr val="1F6FEB"/>
+                    </a:solidFill>
+                  </a:tcPr>
+                </a:tc>
+              </a:tr>
+              <a:tr h="292608">
+                <a:tc>
+                  <a:txBody>
+                    <a:bodyPr/>
+                    <a:lstStyle/>
+                    <a:p>
+                      <a:r>
+                        <a:rPr sz="1100" b="0">
+                          <a:solidFill>
+                            <a:srgbClr val="0B2545"/>
+                          </a:solidFill>
+                          <a:latin typeface="Arial"/>
+                        </a:rPr>
+                        <a:t>cargo.created</a:t>
+                      </a:r>
+                    </a:p>
+                  </a:txBody>
+                  <a:tcPr marL="64008" marR="64008" marT="27432" marB="27432" anchor="ctr">
+                    <a:solidFill>
+                      <a:srgbClr val="FFFFFF"/>
+                    </a:solidFill>
+                  </a:tcPr>
+                </a:tc>
+                <a:tc>
+                  <a:txBody>
+                    <a:bodyPr/>
+                    <a:lstStyle/>
+                    <a:p>
+                      <a:r>
+                        <a:rPr sz="1100" b="0">
+                          <a:solidFill>
+                            <a:srgbClr val="0B2545"/>
+                          </a:solidFill>
+                          <a:latin typeface="Arial"/>
+                        </a:rPr>
+                        <a:t>Kargo oluşturuldu (POST /cargo)</a:t>
+                      </a:r>
+                    </a:p>
+                  </a:txBody>
+                  <a:tcPr marL="64008" marR="64008" marT="27432" marB="27432" anchor="ctr">
+                    <a:solidFill>
+                      <a:srgbClr val="FFFFFF"/>
+                    </a:solidFill>
+                  </a:tcPr>
+                </a:tc>
+              </a:tr>
+              <a:tr h="292608">
+                <a:tc>
+                  <a:txBody>
+                    <a:bodyPr/>
+                    <a:lstStyle/>
+                    <a:p>
+                      <a:r>
+                        <a:rPr sz="1100" b="0">
+                          <a:solidFill>
+                            <a:srgbClr val="0B2545"/>
+                          </a:solidFill>
+                          <a:latin typeface="Arial"/>
+                        </a:rPr>
+                        <a:t>cargo.status_changed</a:t>
+                      </a:r>
+                    </a:p>
+                  </a:txBody>
+                  <a:tcPr marL="64008" marR="64008" marT="27432" marB="27432" anchor="ctr">
+                    <a:solidFill>
+                      <a:srgbClr val="F4F6F8"/>
+                    </a:solidFill>
+                  </a:tcPr>
+                </a:tc>
+                <a:tc>
+                  <a:txBody>
+                    <a:bodyPr/>
+                    <a:lstStyle/>
+                    <a:p>
+                      <a:r>
+                        <a:rPr sz="1100" b="0">
+                          <a:solidFill>
+                            <a:srgbClr val="0B2545"/>
+                          </a:solidFill>
+                          <a:latin typeface="Arial"/>
+                        </a:rPr>
+                        <a:t>Durum değişti (PUT /cargo/&lt;id&gt;/status)</a:t>
+                      </a:r>
+                    </a:p>
+                  </a:txBody>
+                  <a:tcPr marL="64008" marR="64008" marT="27432" marB="27432" anchor="ctr">
+                    <a:solidFill>
+                      <a:srgbClr val="F4F6F8"/>
+                    </a:solidFill>
+                  </a:tcPr>
+                </a:tc>
+              </a:tr>
+              <a:tr h="292608">
+                <a:tc>
+                  <a:txBody>
+                    <a:bodyPr/>
+                    <a:lstStyle/>
+                    <a:p>
+                      <a:r>
+                        <a:rPr sz="1100" b="0">
+                          <a:solidFill>
+                            <a:srgbClr val="0B2545"/>
+                          </a:solidFill>
+                          <a:latin typeface="Arial"/>
+                        </a:rPr>
+                        <a:t>cargo.delivered</a:t>
+                      </a:r>
+                    </a:p>
+                  </a:txBody>
+                  <a:tcPr marL="64008" marR="64008" marT="27432" marB="27432" anchor="ctr">
+                    <a:solidFill>
+                      <a:srgbClr val="FFFFFF"/>
+                    </a:solidFill>
+                  </a:tcPr>
+                </a:tc>
+                <a:tc>
+                  <a:txBody>
+                    <a:bodyPr/>
+                    <a:lstStyle/>
+                    <a:p>
+                      <a:r>
+                        <a:rPr sz="1100" b="0">
+                          <a:solidFill>
+                            <a:srgbClr val="0B2545"/>
+                          </a:solidFill>
+                          <a:latin typeface="Arial"/>
+                        </a:rPr>
+                        <a:t>Durum DELIVERED yapıldı</a:t>
+                      </a:r>
+                    </a:p>
+                  </a:txBody>
+                  <a:tcPr marL="64008" marR="64008" marT="27432" marB="27432" anchor="ctr">
+                    <a:solidFill>
+                      <a:srgbClr val="FFFFFF"/>
+                    </a:solidFill>
+                  </a:tcPr>
+                </a:tc>
+              </a:tr>
+              <a:tr h="292608">
+                <a:tc>
+                  <a:txBody>
+                    <a:bodyPr/>
+                    <a:lstStyle/>
+                    <a:p>
+                      <a:r>
+                        <a:rPr sz="1100" b="0">
+                          <a:solidFill>
+                            <a:srgbClr val="0B2545"/>
+                          </a:solidFill>
+                          <a:latin typeface="Arial"/>
+                        </a:rPr>
+                        <a:t>cargo.cancelled</a:t>
+                      </a:r>
+                    </a:p>
+                  </a:txBody>
+                  <a:tcPr marL="64008" marR="64008" marT="27432" marB="27432" anchor="ctr">
+                    <a:solidFill>
+                      <a:srgbClr val="F4F6F8"/>
+                    </a:solidFill>
+                  </a:tcPr>
+                </a:tc>
+                <a:tc>
+                  <a:txBody>
+                    <a:bodyPr/>
+                    <a:lstStyle/>
+                    <a:p>
+                      <a:r>
+                        <a:rPr sz="1100" b="0">
+                          <a:solidFill>
+                            <a:srgbClr val="0B2545"/>
+                          </a:solidFill>
+                          <a:latin typeface="Arial"/>
+                        </a:rPr>
+                        <a:t>Durum CANCELLED yapıldı</a:t>
+                      </a:r>
+                    </a:p>
+                  </a:txBody>
+                  <a:tcPr marL="64008" marR="64008" marT="27432" marB="27432" anchor="ctr">
+                    <a:solidFill>
+                      <a:srgbClr val="F4F6F8"/>
+                    </a:solidFill>
+                  </a:tcPr>
+                </a:tc>
+              </a:tr>
+              <a:tr h="292608">
+                <a:tc>
+                  <a:txBody>
+                    <a:bodyPr/>
+                    <a:lstStyle/>
+                    <a:p>
+                      <a:r>
+                        <a:rPr sz="1100" b="0">
+                          <a:solidFill>
+                            <a:srgbClr val="0B2545"/>
+                          </a:solidFill>
+                          <a:latin typeface="Arial"/>
+                        </a:rPr>
+                        <a:t>cargo.deleted</a:t>
+                      </a:r>
+                    </a:p>
+                  </a:txBody>
+                  <a:tcPr marL="64008" marR="64008" marT="27432" marB="27432" anchor="ctr">
+                    <a:solidFill>
+                      <a:srgbClr val="FFFFFF"/>
+                    </a:solidFill>
+                  </a:tcPr>
+                </a:tc>
+                <a:tc>
+                  <a:txBody>
+                    <a:bodyPr/>
+                    <a:lstStyle/>
+                    <a:p>
+                      <a:r>
+                        <a:rPr sz="1100" b="0">
+                          <a:solidFill>
+                            <a:srgbClr val="0B2545"/>
+                          </a:solidFill>
+                          <a:latin typeface="Arial"/>
+                        </a:rPr>
+                        <a:t>Kargo silindi (DELETE /cargo/&lt;id&gt;)</a:t>
+                      </a:r>
+                    </a:p>
+                  </a:txBody>
+                  <a:tcPr marL="64008" marR="64008" marT="27432" marB="27432" anchor="ctr">
+                    <a:solidFill>
+                      <a:srgbClr val="FFFFFF"/>
+                    </a:solidFill>
+                  </a:tcPr>
+                </a:tc>
+              </a:tr>
+            </a:tbl>
+          </a:graphicData>
+        </a:graphic>
+      </p:graphicFrame>
+      <p:sp>
+        <p:nvSpPr>
+          <p:cNvPr id="4" name="Rectangle 3"/>
+          <p:cNvSpPr/>
+          <p:nvPr/>
+        </p:nvSpPr>
+        <p:spPr>
+          <a:xfrm>
+            <a:off x="685800" y="3703320"/>
+            <a:ext cx="10789920" cy="457200"/>
+          </a:xfrm>
+          <a:prstGeom prst="rect">
+            <a:avLst/>
+          </a:prstGeom>
+          <a:solidFill>
+            <a:srgbClr val="1F6FEB"/>
+          </a:solidFill>
+          <a:ln>
+            <a:noFill/>
+          </a:ln>
+        </p:spPr>
+        <p:style>
+          <a:lnRef idx="1">
+            <a:schemeClr val="accent1"/>
+          </a:lnRef>
+          <a:fillRef idx="3">
+            <a:schemeClr val="accent1"/>
+          </a:fillRef>
+          <a:effectRef idx="2">
+            <a:schemeClr val="accent1"/>
+          </a:effectRef>
+          <a:fontRef idx="minor">
+            <a:schemeClr val="lt1"/>
+          </a:fontRef>
+        </p:style>
+        <p:txBody>
+          <a:bodyPr rtlCol="0" anchor="ctr" wrap="square" lIns="45720" rIns="45720" tIns="22860" bIns="22860"/>
+          <a:lstStyle/>
+          <a:p>
+            <a:pPr algn="ctr"/>
+            <a:r>
+              <a:rPr sz="1300" b="1">
+                <a:solidFill>
+                  <a:srgbClr val="FFFFFF"/>
+                </a:solidFill>
+                <a:latin typeface="Arial"/>
+              </a:rPr>
+              <a:t>cargo_id  mesaj anahtarı (key) olarak kullanılır</a:t>
+            </a:r>
+          </a:p>
+        </p:txBody>
+      </p:sp>
+      <p:sp>
+        <p:nvSpPr>
+          <p:cNvPr id="5" name="TextBox 4"/>
+          <p:cNvSpPr txBox="1"/>
+          <p:nvPr/>
+        </p:nvSpPr>
+        <p:spPr>
+          <a:xfrm>
+            <a:off x="685800" y="4343400"/>
+            <a:ext cx="10789920" cy="548640"/>
+          </a:xfrm>
+          <a:prstGeom prst="rect">
+            <a:avLst/>
+          </a:prstGeom>
+          <a:noFill/>
+        </p:spPr>
+        <p:txBody>
+          <a:bodyPr wrap="square">
+            <a:spAutoFit/>
+          </a:bodyPr>
+          <a:lstStyle/>
+          <a:p>
+            <a:pPr algn="l">
+              <a:lnSpc>
+                <a:spcPct val="100000"/>
+              </a:lnSpc>
+            </a:pPr>
+            <a:r>
+              <a:rPr sz="1300" b="0">
+                <a:solidFill>
+                  <a:srgbClr val="606B7A"/>
+                </a:solidFill>
+                <a:latin typeface="Arial"/>
+              </a:rPr>
+              <a:t>→ Aynı kargonun event'leri aynı partition'a düşer, sıralama korunur. Key verilmezse round-robin dağıtılır ve sıralama bozulur.</a:t>
             </a:r>
           </a:p>
         </p:txBody>
@@ -6039,20 +7912,38 @@
       <p:grpSpPr/>
       <p:sp>
         <p:nvSpPr>
-          <p:cNvPr id="2" name="Title 1"/>
-          <p:cNvSpPr>
-            <a:spLocks noGrp="1"/>
-          </p:cNvSpPr>
-          <p:nvPr>
-            <p:ph type="title"/>
-          </p:nvPr>
-        </p:nvSpPr>
-        <p:spPr/>
-        <p:txBody>
-          <a:bodyPr/>
-          <a:lstStyle/>
-          <a:p>
-            <a:r>
+          <p:cNvPr id="2" name="TextBox 1"/>
+          <p:cNvSpPr txBox="1"/>
+          <p:nvPr/>
+        </p:nvSpPr>
+        <p:spPr>
+          <a:xfrm>
+            <a:off x="548640" y="320040"/>
+            <a:ext cx="11064240" cy="731520"/>
+          </a:xfrm>
+          <a:prstGeom prst="rect">
+            <a:avLst/>
+          </a:prstGeom>
+          <a:noFill/>
+        </p:spPr>
+        <p:txBody>
+          <a:bodyPr wrap="square">
+            <a:spAutoFit/>
+          </a:bodyPr>
+          <a:lstStyle/>
+          <a:p>
+            <a:pPr algn="l">
+              <a:lnSpc>
+                <a:spcPct val="100000"/>
+              </a:lnSpc>
+            </a:pPr>
+            <a:r>
+              <a:rPr sz="3000" b="1">
+                <a:solidFill>
+                  <a:srgbClr val="0B2545"/>
+                </a:solidFill>
+                <a:latin typeface="Arial"/>
+              </a:rPr>
               <a:t>Tasarım Kararı: Kafka Yokken API Çökmez</a:t>
             </a:r>
           </a:p>
@@ -6060,51 +7951,203 @@
       </p:sp>
       <p:sp>
         <p:nvSpPr>
-          <p:cNvPr id="3" name="Content Placeholder 2"/>
-          <p:cNvSpPr>
-            <a:spLocks noGrp="1"/>
-          </p:cNvSpPr>
-          <p:nvPr>
-            <p:ph idx="1"/>
-          </p:nvPr>
-        </p:nvSpPr>
-        <p:spPr/>
-        <p:txBody>
-          <a:bodyPr/>
-          <a:lstStyle/>
-          <a:p>
-            <a:pPr/>
-            <a:r>
-              <a:rPr/>
-              <a:t>Producer tembel (lazy) bağlanır: uygulama açılışında değil, ilk gönderimde</a:t>
-            </a:r>
-          </a:p>
-          <a:p>
-            <a:pPr/>
-            <a:r>
-              <a:rPr/>
-              <a:t>Broker kapalıysa API isteği yine 201/200 döner, event kaybolur ve loglanır</a:t>
-            </a:r>
-          </a:p>
-          <a:p>
-            <a:pPr/>
-            <a:r>
-              <a:rPr/>
-              <a:t>Retry: 3 deneme, 3 saniye zaman aşımı</a:t>
-            </a:r>
-          </a:p>
-          <a:p>
-            <a:pPr/>
-            <a:r>
-              <a:rPr/>
-              <a:t>Sonuç: veri yazma sorumluluğu ile event yayınlama sorumluluğu ayrışır</a:t>
-            </a:r>
-          </a:p>
-          <a:p>
-            <a:pPr/>
-            <a:r>
-              <a:rPr/>
-              <a:t>Pratik fayda: API ve testler Kafka kurulmadan doğrulanabilir</a:t>
+          <p:cNvPr id="3" name="TextBox 2"/>
+          <p:cNvSpPr txBox="1"/>
+          <p:nvPr/>
+        </p:nvSpPr>
+        <p:spPr>
+          <a:xfrm>
+            <a:off x="685800" y="1325880"/>
+            <a:ext cx="10789920" cy="2286000"/>
+          </a:xfrm>
+          <a:prstGeom prst="rect">
+            <a:avLst/>
+          </a:prstGeom>
+          <a:noFill/>
+        </p:spPr>
+        <p:txBody>
+          <a:bodyPr wrap="square">
+            <a:spAutoFit/>
+          </a:bodyPr>
+          <a:lstStyle/>
+          <a:p>
+            <a:pPr>
+              <a:lnSpc>
+                <a:spcPct val="115000"/>
+              </a:lnSpc>
+              <a:spcAft>
+                <a:spcPts val="1200"/>
+              </a:spcAft>
+            </a:pPr>
+            <a:r>
+              <a:rPr sz="1700">
+                <a:solidFill>
+                  <a:srgbClr val="0B2545"/>
+                </a:solidFill>
+                <a:latin typeface="Arial"/>
+              </a:rPr>
+              <a:t>•  Producer tembel (lazy) bağlanır — uygulama açılışında değil, ilk gönderimde</a:t>
+            </a:r>
+          </a:p>
+          <a:p>
+            <a:pPr>
+              <a:lnSpc>
+                <a:spcPct val="115000"/>
+              </a:lnSpc>
+              <a:spcAft>
+                <a:spcPts val="1200"/>
+              </a:spcAft>
+            </a:pPr>
+            <a:r>
+              <a:rPr sz="1700">
+                <a:solidFill>
+                  <a:srgbClr val="0B2545"/>
+                </a:solidFill>
+                <a:latin typeface="Arial"/>
+              </a:rPr>
+              <a:t>•  Broker kapalıysa API isteği yine 201/200 döner</a:t>
+            </a:r>
+          </a:p>
+          <a:p>
+            <a:pPr>
+              <a:lnSpc>
+                <a:spcPct val="115000"/>
+              </a:lnSpc>
+              <a:spcAft>
+                <a:spcPts val="1200"/>
+              </a:spcAft>
+            </a:pPr>
+            <a:r>
+              <a:rPr sz="1700">
+                <a:solidFill>
+                  <a:srgbClr val="0B2545"/>
+                </a:solidFill>
+                <a:latin typeface="Arial"/>
+              </a:rPr>
+              <a:t>•  Event kaybolur ve terminale uyarı loglanır</a:t>
+            </a:r>
+          </a:p>
+          <a:p>
+            <a:pPr>
+              <a:lnSpc>
+                <a:spcPct val="115000"/>
+              </a:lnSpc>
+              <a:spcAft>
+                <a:spcPts val="1200"/>
+              </a:spcAft>
+            </a:pPr>
+            <a:r>
+              <a:rPr sz="1700">
+                <a:solidFill>
+                  <a:srgbClr val="0B2545"/>
+                </a:solidFill>
+                <a:latin typeface="Arial"/>
+              </a:rPr>
+              <a:t>•  Retry: 3 deneme, 3 saniye istek zaman aşımı</a:t>
+            </a:r>
+          </a:p>
+        </p:txBody>
+      </p:sp>
+      <p:sp>
+        <p:nvSpPr>
+          <p:cNvPr id="4" name="Rectangle 3"/>
+          <p:cNvSpPr/>
+          <p:nvPr/>
+        </p:nvSpPr>
+        <p:spPr>
+          <a:xfrm>
+            <a:off x="685800" y="3840480"/>
+            <a:ext cx="10789920" cy="502920"/>
+          </a:xfrm>
+          <a:prstGeom prst="rect">
+            <a:avLst/>
+          </a:prstGeom>
+          <a:solidFill>
+            <a:srgbClr val="1F6FEB"/>
+          </a:solidFill>
+          <a:ln>
+            <a:noFill/>
+          </a:ln>
+        </p:spPr>
+        <p:style>
+          <a:lnRef idx="1">
+            <a:schemeClr val="accent1"/>
+          </a:lnRef>
+          <a:fillRef idx="3">
+            <a:schemeClr val="accent1"/>
+          </a:fillRef>
+          <a:effectRef idx="2">
+            <a:schemeClr val="accent1"/>
+          </a:effectRef>
+          <a:fontRef idx="minor">
+            <a:schemeClr val="lt1"/>
+          </a:fontRef>
+        </p:style>
+        <p:txBody>
+          <a:bodyPr rtlCol="0" anchor="ctr" wrap="square" lIns="45720" rIns="45720" tIns="22860" bIns="22860"/>
+          <a:lstStyle/>
+          <a:p>
+            <a:pPr algn="ctr"/>
+            <a:r>
+              <a:rPr sz="1400" b="1">
+                <a:solidFill>
+                  <a:srgbClr val="FFFFFF"/>
+                </a:solidFill>
+                <a:latin typeface="Arial"/>
+              </a:rPr>
+              <a:t>Sonuç:  veri yazma sorumluluğu ile event yayınlama sorumluluğu ayrışır</a:t>
+            </a:r>
+          </a:p>
+        </p:txBody>
+      </p:sp>
+      <p:sp>
+        <p:nvSpPr>
+          <p:cNvPr id="5" name="Rectangle 4"/>
+          <p:cNvSpPr/>
+          <p:nvPr/>
+        </p:nvSpPr>
+        <p:spPr>
+          <a:xfrm>
+            <a:off x="685800" y="4572000"/>
+            <a:ext cx="10789920" cy="502920"/>
+          </a:xfrm>
+          <a:prstGeom prst="rect">
+            <a:avLst/>
+          </a:prstGeom>
+          <a:solidFill>
+            <a:srgbClr val="F4F6F8"/>
+          </a:solidFill>
+          <a:ln>
+            <a:noFill/>
+          </a:ln>
+        </p:spPr>
+        <p:style>
+          <a:lnRef idx="1">
+            <a:schemeClr val="accent1"/>
+          </a:lnRef>
+          <a:fillRef idx="3">
+            <a:schemeClr val="accent1"/>
+          </a:fillRef>
+          <a:effectRef idx="2">
+            <a:schemeClr val="accent1"/>
+          </a:effectRef>
+          <a:fontRef idx="minor">
+            <a:schemeClr val="lt1"/>
+          </a:fontRef>
+        </p:style>
+        <p:txBody>
+          <a:bodyPr rtlCol="0" anchor="ctr" wrap="square" lIns="45720" rIns="45720" tIns="22860" bIns="22860"/>
+          <a:lstStyle/>
+          <a:p>
+            <a:pPr algn="ctr"/>
+            <a:r>
+              <a:rPr sz="1400" b="1">
+                <a:solidFill>
+                  <a:srgbClr val="0B2545"/>
+                </a:solidFill>
+                <a:latin typeface="Arial"/>
+              </a:rPr>
+              <a:t>Pratik fayda:  API ve testler Kafka kurulmadan doğrulanabilir (testler KAFKA_ENABLED=0 ile koşar)</a:t>
             </a:r>
           </a:p>
         </p:txBody>
@@ -6129,66 +8172,54 @@
       <p:grpSpPr/>
       <p:sp>
         <p:nvSpPr>
-          <p:cNvPr id="2" name="Title 1"/>
-          <p:cNvSpPr>
-            <a:spLocks noGrp="1"/>
-          </p:cNvSpPr>
-          <p:nvPr>
-            <p:ph type="title"/>
-          </p:nvPr>
-        </p:nvSpPr>
-        <p:spPr/>
-        <p:txBody>
-          <a:bodyPr/>
-          <a:lstStyle/>
-          <a:p>
-            <a:r>
+          <p:cNvPr id="2" name="TextBox 1"/>
+          <p:cNvSpPr txBox="1"/>
+          <p:nvPr/>
+        </p:nvSpPr>
+        <p:spPr>
+          <a:xfrm>
+            <a:off x="548640" y="320040"/>
+            <a:ext cx="11064240" cy="731520"/>
+          </a:xfrm>
+          <a:prstGeom prst="rect">
+            <a:avLst/>
+          </a:prstGeom>
+          <a:noFill/>
+        </p:spPr>
+        <p:txBody>
+          <a:bodyPr wrap="square">
+            <a:spAutoFit/>
+          </a:bodyPr>
+          <a:lstStyle/>
+          <a:p>
+            <a:pPr algn="l">
+              <a:lnSpc>
+                <a:spcPct val="100000"/>
+              </a:lnSpc>
+            </a:pPr>
+            <a:r>
+              <a:rPr sz="3000" b="1">
+                <a:solidFill>
+                  <a:srgbClr val="0B2545"/>
+                </a:solidFill>
+                <a:latin typeface="Arial"/>
+              </a:rPr>
               <a:t>Prometheus Metrikleri</a:t>
-            </a:r>
-          </a:p>
-        </p:txBody>
-      </p:sp>
-      <p:sp>
-        <p:nvSpPr>
-          <p:cNvPr id="3" name="Content Placeholder 2"/>
-          <p:cNvSpPr>
-            <a:spLocks noGrp="1"/>
-          </p:cNvSpPr>
-          <p:nvPr>
-            <p:ph idx="1"/>
-          </p:nvPr>
-        </p:nvSpPr>
-        <p:spPr/>
-        <p:txBody>
-          <a:bodyPr/>
-          <a:lstStyle/>
-          <a:p>
-            <a:pPr/>
-            <a:r>
-              <a:rPr/>
-              <a:t>Histogram otomatik _sum / _count / _max üretir → ortalama süre sorgusu mümkün</a:t>
-            </a:r>
-          </a:p>
-          <a:p>
-            <a:pPr/>
-            <a:r>
-              <a:rPr/>
-              <a:t>Etiket seçimi (method, endpoint, status) sorgu esnekliği sağlar</a:t>
             </a:r>
           </a:p>
         </p:txBody>
       </p:sp>
       <p:graphicFrame>
         <p:nvGraphicFramePr>
-          <p:cNvPr id="4" name="Table 3"/>
+          <p:cNvPr id="3" name="Table 2"/>
           <p:cNvGraphicFramePr>
             <a:graphicFrameLocks noGrp="1"/>
           </p:cNvGraphicFramePr>
           <p:nvPr/>
         </p:nvGraphicFramePr>
         <p:xfrm>
-          <a:off x="914400" y="1828800"/>
-          <a:ext cx="5486400" cy="1828800"/>
+          <a:off x="685800" y="1325880"/>
+          <a:ext cx="10789919" cy="2048256"/>
         </p:xfrm>
         <a:graphic>
           <a:graphicData uri="http://schemas.openxmlformats.org/drawingml/2006/table">
@@ -6197,22 +8228,32 @@
                 <a:tableStyleId>{5C22544A-7EE6-4342-B048-85BDC9FD1C3A}</a:tableStyleId>
               </a:tblPr>
               <a:tblGrid>
-                <a:gridCol w="1828800"/>
-                <a:gridCol w="1828800"/>
-                <a:gridCol w="1828800"/>
+                <a:gridCol w="4654475"/>
+                <a:gridCol w="2009887"/>
+                <a:gridCol w="4125557"/>
               </a:tblGrid>
-              <a:tr h="261257">
+              <a:tr h="292608">
                 <a:tc>
                   <a:txBody>
                     <a:bodyPr/>
                     <a:lstStyle/>
                     <a:p>
                       <a:r>
+                        <a:rPr sz="1100" b="1">
+                          <a:solidFill>
+                            <a:srgbClr val="FFFFFF"/>
+                          </a:solidFill>
+                          <a:latin typeface="Arial"/>
+                        </a:rPr>
                         <a:t>Metrik</a:t>
                       </a:r>
                     </a:p>
                   </a:txBody>
-                  <a:tcPr/>
+                  <a:tcPr marL="64008" marR="64008" marT="27432" marB="27432" anchor="ctr">
+                    <a:solidFill>
+                      <a:srgbClr val="1F6FEB"/>
+                    </a:solidFill>
+                  </a:tcPr>
                 </a:tc>
                 <a:tc>
                   <a:txBody>
@@ -6220,11 +8261,21 @@
                     <a:lstStyle/>
                     <a:p>
                       <a:r>
+                        <a:rPr sz="1100" b="1">
+                          <a:solidFill>
+                            <a:srgbClr val="FFFFFF"/>
+                          </a:solidFill>
+                          <a:latin typeface="Arial"/>
+                        </a:rPr>
                         <a:t>Tip</a:t>
                       </a:r>
                     </a:p>
                   </a:txBody>
-                  <a:tcPr/>
+                  <a:tcPr marL="64008" marR="64008" marT="27432" marB="27432" anchor="ctr">
+                    <a:solidFill>
+                      <a:srgbClr val="1F6FEB"/>
+                    </a:solidFill>
+                  </a:tcPr>
                 </a:tc>
                 <a:tc>
                   <a:txBody>
@@ -6232,25 +8283,45 @@
                     <a:lstStyle/>
                     <a:p>
                       <a:r>
+                        <a:rPr sz="1100" b="1">
+                          <a:solidFill>
+                            <a:srgbClr val="FFFFFF"/>
+                          </a:solidFill>
+                          <a:latin typeface="Arial"/>
+                        </a:rPr>
                         <a:t>Ne ölçer</a:t>
                       </a:r>
                     </a:p>
                   </a:txBody>
-                  <a:tcPr/>
+                  <a:tcPr marL="64008" marR="64008" marT="27432" marB="27432" anchor="ctr">
+                    <a:solidFill>
+                      <a:srgbClr val="1F6FEB"/>
+                    </a:solidFill>
+                  </a:tcPr>
                 </a:tc>
               </a:tr>
-              <a:tr h="261257">
+              <a:tr h="292608">
                 <a:tc>
                   <a:txBody>
                     <a:bodyPr/>
                     <a:lstStyle/>
                     <a:p>
                       <a:r>
+                        <a:rPr sz="1100" b="0">
+                          <a:solidFill>
+                            <a:srgbClr val="0B2545"/>
+                          </a:solidFill>
+                          <a:latin typeface="Arial"/>
+                        </a:rPr>
                         <a:t>cargo_created_total</a:t>
                       </a:r>
                     </a:p>
                   </a:txBody>
-                  <a:tcPr/>
+                  <a:tcPr marL="64008" marR="64008" marT="27432" marB="27432" anchor="ctr">
+                    <a:solidFill>
+                      <a:srgbClr val="FFFFFF"/>
+                    </a:solidFill>
+                  </a:tcPr>
                 </a:tc>
                 <a:tc>
                   <a:txBody>
@@ -6258,11 +8329,21 @@
                     <a:lstStyle/>
                     <a:p>
                       <a:r>
+                        <a:rPr sz="1100" b="0">
+                          <a:solidFill>
+                            <a:srgbClr val="0B2545"/>
+                          </a:solidFill>
+                          <a:latin typeface="Arial"/>
+                        </a:rPr>
                         <a:t>Counter</a:t>
                       </a:r>
                     </a:p>
                   </a:txBody>
-                  <a:tcPr/>
+                  <a:tcPr marL="64008" marR="64008" marT="27432" marB="27432" anchor="ctr">
+                    <a:solidFill>
+                      <a:srgbClr val="FFFFFF"/>
+                    </a:solidFill>
+                  </a:tcPr>
                 </a:tc>
                 <a:tc>
                   <a:txBody>
@@ -6270,25 +8351,45 @@
                     <a:lstStyle/>
                     <a:p>
                       <a:r>
-                        <a:t>Oluşturulan kargo</a:t>
+                        <a:rPr sz="1100" b="0">
+                          <a:solidFill>
+                            <a:srgbClr val="0B2545"/>
+                          </a:solidFill>
+                          <a:latin typeface="Arial"/>
+                        </a:rPr>
+                        <a:t>Oluşturulan kargo sayısı</a:t>
                       </a:r>
                     </a:p>
                   </a:txBody>
-                  <a:tcPr/>
+                  <a:tcPr marL="64008" marR="64008" marT="27432" marB="27432" anchor="ctr">
+                    <a:solidFill>
+                      <a:srgbClr val="FFFFFF"/>
+                    </a:solidFill>
+                  </a:tcPr>
                 </a:tc>
               </a:tr>
-              <a:tr h="261257">
+              <a:tr h="292608">
                 <a:tc>
                   <a:txBody>
                     <a:bodyPr/>
                     <a:lstStyle/>
                     <a:p>
                       <a:r>
+                        <a:rPr sz="1100" b="0">
+                          <a:solidFill>
+                            <a:srgbClr val="0B2545"/>
+                          </a:solidFill>
+                          <a:latin typeface="Arial"/>
+                        </a:rPr>
                         <a:t>cargo_delivered_total</a:t>
                       </a:r>
                     </a:p>
                   </a:txBody>
-                  <a:tcPr/>
+                  <a:tcPr marL="64008" marR="64008" marT="27432" marB="27432" anchor="ctr">
+                    <a:solidFill>
+                      <a:srgbClr val="F4F6F8"/>
+                    </a:solidFill>
+                  </a:tcPr>
                 </a:tc>
                 <a:tc>
                   <a:txBody>
@@ -6296,11 +8397,21 @@
                     <a:lstStyle/>
                     <a:p>
                       <a:r>
+                        <a:rPr sz="1100" b="0">
+                          <a:solidFill>
+                            <a:srgbClr val="0B2545"/>
+                          </a:solidFill>
+                          <a:latin typeface="Arial"/>
+                        </a:rPr>
                         <a:t>Counter</a:t>
                       </a:r>
                     </a:p>
                   </a:txBody>
-                  <a:tcPr/>
+                  <a:tcPr marL="64008" marR="64008" marT="27432" marB="27432" anchor="ctr">
+                    <a:solidFill>
+                      <a:srgbClr val="F4F6F8"/>
+                    </a:solidFill>
+                  </a:tcPr>
                 </a:tc>
                 <a:tc>
                   <a:txBody>
@@ -6308,25 +8419,45 @@
                     <a:lstStyle/>
                     <a:p>
                       <a:r>
-                        <a:t>Teslim edilen</a:t>
+                        <a:rPr sz="1100" b="0">
+                          <a:solidFill>
+                            <a:srgbClr val="0B2545"/>
+                          </a:solidFill>
+                          <a:latin typeface="Arial"/>
+                        </a:rPr>
+                        <a:t>Teslim edilen kargo</a:t>
                       </a:r>
                     </a:p>
                   </a:txBody>
-                  <a:tcPr/>
+                  <a:tcPr marL="64008" marR="64008" marT="27432" marB="27432" anchor="ctr">
+                    <a:solidFill>
+                      <a:srgbClr val="F4F6F8"/>
+                    </a:solidFill>
+                  </a:tcPr>
                 </a:tc>
               </a:tr>
-              <a:tr h="261257">
+              <a:tr h="292608">
                 <a:tc>
                   <a:txBody>
                     <a:bodyPr/>
                     <a:lstStyle/>
                     <a:p>
                       <a:r>
+                        <a:rPr sz="1100" b="0">
+                          <a:solidFill>
+                            <a:srgbClr val="0B2545"/>
+                          </a:solidFill>
+                          <a:latin typeface="Arial"/>
+                        </a:rPr>
                         <a:t>cargo_cancelled_total</a:t>
                       </a:r>
                     </a:p>
                   </a:txBody>
-                  <a:tcPr/>
+                  <a:tcPr marL="64008" marR="64008" marT="27432" marB="27432" anchor="ctr">
+                    <a:solidFill>
+                      <a:srgbClr val="FFFFFF"/>
+                    </a:solidFill>
+                  </a:tcPr>
                 </a:tc>
                 <a:tc>
                   <a:txBody>
@@ -6334,11 +8465,21 @@
                     <a:lstStyle/>
                     <a:p>
                       <a:r>
+                        <a:rPr sz="1100" b="0">
+                          <a:solidFill>
+                            <a:srgbClr val="0B2545"/>
+                          </a:solidFill>
+                          <a:latin typeface="Arial"/>
+                        </a:rPr>
                         <a:t>Counter</a:t>
                       </a:r>
                     </a:p>
                   </a:txBody>
-                  <a:tcPr/>
+                  <a:tcPr marL="64008" marR="64008" marT="27432" marB="27432" anchor="ctr">
+                    <a:solidFill>
+                      <a:srgbClr val="FFFFFF"/>
+                    </a:solidFill>
+                  </a:tcPr>
                 </a:tc>
                 <a:tc>
                   <a:txBody>
@@ -6346,25 +8487,45 @@
                     <a:lstStyle/>
                     <a:p>
                       <a:r>
-                        <a:t>İptal edilen</a:t>
+                        <a:rPr sz="1100" b="0">
+                          <a:solidFill>
+                            <a:srgbClr val="0B2545"/>
+                          </a:solidFill>
+                          <a:latin typeface="Arial"/>
+                        </a:rPr>
+                        <a:t>İptal edilen kargo</a:t>
                       </a:r>
                     </a:p>
                   </a:txBody>
-                  <a:tcPr/>
+                  <a:tcPr marL="64008" marR="64008" marT="27432" marB="27432" anchor="ctr">
+                    <a:solidFill>
+                      <a:srgbClr val="FFFFFF"/>
+                    </a:solidFill>
+                  </a:tcPr>
                 </a:tc>
               </a:tr>
-              <a:tr h="261257">
+              <a:tr h="292608">
                 <a:tc>
                   <a:txBody>
                     <a:bodyPr/>
                     <a:lstStyle/>
                     <a:p>
                       <a:r>
+                        <a:rPr sz="1100" b="0">
+                          <a:solidFill>
+                            <a:srgbClr val="0B2545"/>
+                          </a:solidFill>
+                          <a:latin typeface="Arial"/>
+                        </a:rPr>
                         <a:t>cargo_status_changed_total</a:t>
                       </a:r>
                     </a:p>
                   </a:txBody>
-                  <a:tcPr/>
+                  <a:tcPr marL="64008" marR="64008" marT="27432" marB="27432" anchor="ctr">
+                    <a:solidFill>
+                      <a:srgbClr val="F4F6F8"/>
+                    </a:solidFill>
+                  </a:tcPr>
                 </a:tc>
                 <a:tc>
                   <a:txBody>
@@ -6372,11 +8533,21 @@
                     <a:lstStyle/>
                     <a:p>
                       <a:r>
+                        <a:rPr sz="1100" b="0">
+                          <a:solidFill>
+                            <a:srgbClr val="0B2545"/>
+                          </a:solidFill>
+                          <a:latin typeface="Arial"/>
+                        </a:rPr>
                         <a:t>Counter</a:t>
                       </a:r>
                     </a:p>
                   </a:txBody>
-                  <a:tcPr/>
+                  <a:tcPr marL="64008" marR="64008" marT="27432" marB="27432" anchor="ctr">
+                    <a:solidFill>
+                      <a:srgbClr val="F4F6F8"/>
+                    </a:solidFill>
+                  </a:tcPr>
                 </a:tc>
                 <a:tc>
                   <a:txBody>
@@ -6384,25 +8555,45 @@
                     <a:lstStyle/>
                     <a:p>
                       <a:r>
+                        <a:rPr sz="1100" b="0">
+                          <a:solidFill>
+                            <a:srgbClr val="0B2545"/>
+                          </a:solidFill>
+                          <a:latin typeface="Arial"/>
+                        </a:rPr>
                         <a:t>Durum değişikliği</a:t>
                       </a:r>
                     </a:p>
                   </a:txBody>
-                  <a:tcPr/>
+                  <a:tcPr marL="64008" marR="64008" marT="27432" marB="27432" anchor="ctr">
+                    <a:solidFill>
+                      <a:srgbClr val="F4F6F8"/>
+                    </a:solidFill>
+                  </a:tcPr>
                 </a:tc>
               </a:tr>
-              <a:tr h="261257">
+              <a:tr h="292608">
                 <a:tc>
                   <a:txBody>
                     <a:bodyPr/>
                     <a:lstStyle/>
                     <a:p>
                       <a:r>
+                        <a:rPr sz="1100" b="0">
+                          <a:solidFill>
+                            <a:srgbClr val="0B2545"/>
+                          </a:solidFill>
+                          <a:latin typeface="Arial"/>
+                        </a:rPr>
                         <a:t>api_request_total</a:t>
                       </a:r>
                     </a:p>
                   </a:txBody>
-                  <a:tcPr/>
+                  <a:tcPr marL="64008" marR="64008" marT="27432" marB="27432" anchor="ctr">
+                    <a:solidFill>
+                      <a:srgbClr val="FFFFFF"/>
+                    </a:solidFill>
+                  </a:tcPr>
                 </a:tc>
                 <a:tc>
                   <a:txBody>
@@ -6410,11 +8601,21 @@
                     <a:lstStyle/>
                     <a:p>
                       <a:r>
+                        <a:rPr sz="1100" b="0">
+                          <a:solidFill>
+                            <a:srgbClr val="0B2545"/>
+                          </a:solidFill>
+                          <a:latin typeface="Arial"/>
+                        </a:rPr>
                         <a:t>Counter</a:t>
                       </a:r>
                     </a:p>
                   </a:txBody>
-                  <a:tcPr/>
+                  <a:tcPr marL="64008" marR="64008" marT="27432" marB="27432" anchor="ctr">
+                    <a:solidFill>
+                      <a:srgbClr val="FFFFFF"/>
+                    </a:solidFill>
+                  </a:tcPr>
                 </a:tc>
                 <a:tc>
                   <a:txBody>
@@ -6422,25 +8623,45 @@
                     <a:lstStyle/>
                     <a:p>
                       <a:r>
+                        <a:rPr sz="1100" b="0">
+                          <a:solidFill>
+                            <a:srgbClr val="0B2545"/>
+                          </a:solidFill>
+                          <a:latin typeface="Arial"/>
+                        </a:rPr>
                         <a:t>İstek sayısı (3 etiket)</a:t>
                       </a:r>
                     </a:p>
                   </a:txBody>
-                  <a:tcPr/>
+                  <a:tcPr marL="64008" marR="64008" marT="27432" marB="27432" anchor="ctr">
+                    <a:solidFill>
+                      <a:srgbClr val="FFFFFF"/>
+                    </a:solidFill>
+                  </a:tcPr>
                 </a:tc>
               </a:tr>
-              <a:tr h="261258">
+              <a:tr h="292608">
                 <a:tc>
                   <a:txBody>
                     <a:bodyPr/>
                     <a:lstStyle/>
                     <a:p>
                       <a:r>
+                        <a:rPr sz="1100" b="0">
+                          <a:solidFill>
+                            <a:srgbClr val="0B2545"/>
+                          </a:solidFill>
+                          <a:latin typeface="Arial"/>
+                        </a:rPr>
                         <a:t>api_request_duration_seconds</a:t>
                       </a:r>
                     </a:p>
                   </a:txBody>
-                  <a:tcPr/>
+                  <a:tcPr marL="64008" marR="64008" marT="27432" marB="27432" anchor="ctr">
+                    <a:solidFill>
+                      <a:srgbClr val="F4F6F8"/>
+                    </a:solidFill>
+                  </a:tcPr>
                 </a:tc>
                 <a:tc>
                   <a:txBody>
@@ -6448,11 +8669,21 @@
                     <a:lstStyle/>
                     <a:p>
                       <a:r>
+                        <a:rPr sz="1100" b="0">
+                          <a:solidFill>
+                            <a:srgbClr val="0B2545"/>
+                          </a:solidFill>
+                          <a:latin typeface="Arial"/>
+                        </a:rPr>
                         <a:t>Histogram</a:t>
                       </a:r>
                     </a:p>
                   </a:txBody>
-                  <a:tcPr/>
+                  <a:tcPr marL="64008" marR="64008" marT="27432" marB="27432" anchor="ctr">
+                    <a:solidFill>
+                      <a:srgbClr val="F4F6F8"/>
+                    </a:solidFill>
+                  </a:tcPr>
                 </a:tc>
                 <a:tc>
                   <a:txBody>
@@ -6460,17 +8691,118 @@
                     <a:lstStyle/>
                     <a:p>
                       <a:r>
+                        <a:rPr sz="1100" b="0">
+                          <a:solidFill>
+                            <a:srgbClr val="0B2545"/>
+                          </a:solidFill>
+                          <a:latin typeface="Arial"/>
+                        </a:rPr>
                         <a:t>İstek süresi</a:t>
                       </a:r>
                     </a:p>
                   </a:txBody>
-                  <a:tcPr/>
+                  <a:tcPr marL="64008" marR="64008" marT="27432" marB="27432" anchor="ctr">
+                    <a:solidFill>
+                      <a:srgbClr val="F4F6F8"/>
+                    </a:solidFill>
+                  </a:tcPr>
                 </a:tc>
               </a:tr>
             </a:tbl>
           </a:graphicData>
         </a:graphic>
       </p:graphicFrame>
+      <p:sp>
+        <p:nvSpPr>
+          <p:cNvPr id="4" name="Rectangle 3"/>
+          <p:cNvSpPr/>
+          <p:nvPr/>
+        </p:nvSpPr>
+        <p:spPr>
+          <a:xfrm>
+            <a:off x="685800" y="3977639"/>
+            <a:ext cx="10789920" cy="457200"/>
+          </a:xfrm>
+          <a:prstGeom prst="rect">
+            <a:avLst/>
+          </a:prstGeom>
+          <a:solidFill>
+            <a:srgbClr val="F4F6F8"/>
+          </a:solidFill>
+          <a:ln>
+            <a:noFill/>
+          </a:ln>
+        </p:spPr>
+        <p:style>
+          <a:lnRef idx="1">
+            <a:schemeClr val="accent1"/>
+          </a:lnRef>
+          <a:fillRef idx="3">
+            <a:schemeClr val="accent1"/>
+          </a:fillRef>
+          <a:effectRef idx="2">
+            <a:schemeClr val="accent1"/>
+          </a:effectRef>
+          <a:fontRef idx="minor">
+            <a:schemeClr val="lt1"/>
+          </a:fontRef>
+        </p:style>
+        <p:txBody>
+          <a:bodyPr rtlCol="0" anchor="ctr" wrap="square" lIns="45720" rIns="45720" tIns="22860" bIns="22860"/>
+          <a:lstStyle/>
+          <a:p>
+            <a:pPr algn="ctr"/>
+            <a:r>
+              <a:rPr sz="1300" b="1">
+                <a:solidFill>
+                  <a:srgbClr val="0B2545"/>
+                </a:solidFill>
+                <a:latin typeface="Arial"/>
+              </a:rPr>
+              <a:t>Histogram otomatik _sum / _count / _max üretir → ortalama süre sorgusu mümkün</a:t>
+            </a:r>
+          </a:p>
+        </p:txBody>
+      </p:sp>
+      <p:sp>
+        <p:nvSpPr>
+          <p:cNvPr id="5" name="TextBox 4"/>
+          <p:cNvSpPr txBox="1"/>
+          <p:nvPr/>
+        </p:nvSpPr>
+        <p:spPr>
+          <a:xfrm>
+            <a:off x="685800" y="4572000"/>
+            <a:ext cx="10789920" cy="365760"/>
+          </a:xfrm>
+          <a:prstGeom prst="rect">
+            <a:avLst/>
+          </a:prstGeom>
+          <a:noFill/>
+        </p:spPr>
+        <p:txBody>
+          <a:bodyPr wrap="square">
+            <a:spAutoFit/>
+          </a:bodyPr>
+          <a:lstStyle/>
+          <a:p>
+            <a:pPr algn="l">
+              <a:lnSpc>
+                <a:spcPct val="100000"/>
+              </a:lnSpc>
+            </a:pPr>
+            <a:r>
+              <a:rPr sz="1200" b="0">
+                <a:solidFill>
+                  <a:srgbClr val="606B7A"/>
+                </a:solidFill>
+                <a:latin typeface="Arial"/>
+              </a:rPr>
+              <a:t>Counter yalnızca artar (kargo sayısı monoton artar), Gauge ini çekilir.</a:t>
+            </a:r>
+          </a:p>
+        </p:txBody>
+      </p:sp>
     </p:spTree>
   </p:cSld>
   <p:clrMapOvr>
@@ -6491,65 +8823,354 @@
       <p:grpSpPr/>
       <p:sp>
         <p:nvSpPr>
-          <p:cNvPr id="2" name="Title 1"/>
-          <p:cNvSpPr>
-            <a:spLocks noGrp="1"/>
-          </p:cNvSpPr>
-          <p:nvPr>
-            <p:ph type="title"/>
-          </p:nvPr>
-        </p:nvSpPr>
-        <p:spPr/>
-        <p:txBody>
-          <a:bodyPr/>
-          <a:lstStyle/>
-          <a:p>
-            <a:r>
+          <p:cNvPr id="2" name="TextBox 1"/>
+          <p:cNvSpPr txBox="1"/>
+          <p:nvPr/>
+        </p:nvSpPr>
+        <p:spPr>
+          <a:xfrm>
+            <a:off x="548640" y="320040"/>
+            <a:ext cx="11064240" cy="731520"/>
+          </a:xfrm>
+          <a:prstGeom prst="rect">
+            <a:avLst/>
+          </a:prstGeom>
+          <a:noFill/>
+        </p:spPr>
+        <p:txBody>
+          <a:bodyPr wrap="square">
+            <a:spAutoFit/>
+          </a:bodyPr>
+          <a:lstStyle/>
+          <a:p>
+            <a:pPr algn="l">
+              <a:lnSpc>
+                <a:spcPct val="100000"/>
+              </a:lnSpc>
+            </a:pPr>
+            <a:r>
+              <a:rPr sz="3000" b="1">
+                <a:solidFill>
+                  <a:srgbClr val="0B2545"/>
+                </a:solidFill>
+                <a:latin typeface="Arial"/>
+              </a:rPr>
               <a:t>Grafana Dashboard</a:t>
             </a:r>
           </a:p>
         </p:txBody>
       </p:sp>
-      <p:sp>
-        <p:nvSpPr>
-          <p:cNvPr id="3" name="Content Placeholder 2"/>
-          <p:cNvSpPr>
-            <a:spLocks noGrp="1"/>
-          </p:cNvSpPr>
-          <p:nvPr>
-            <p:ph idx="1"/>
-          </p:nvPr>
-        </p:nvSpPr>
-        <p:spPr/>
-        <p:txBody>
-          <a:bodyPr/>
-          <a:lstStyle/>
-          <a:p>
-            <a:pPr/>
-            <a:r>
-              <a:rPr/>
-              <a:t>6 istatistik paneli: Toplam, Teslim, İptal, Aktif Kargo, Event, API İsteği</a:t>
-            </a:r>
-          </a:p>
-          <a:p>
-            <a:pPr/>
-            <a:r>
-              <a:rPr/>
-              <a:t>4 zaman serisi grafiği: dakikadaki işlem, API süresi, event türleri, durum dağılımı</a:t>
-            </a:r>
-          </a:p>
-          <a:p>
-            <a:pPr/>
-            <a:r>
-              <a:rPr/>
+      <p:graphicFrame>
+        <p:nvGraphicFramePr>
+          <p:cNvPr id="3" name="Table 2"/>
+          <p:cNvGraphicFramePr>
+            <a:graphicFrameLocks noGrp="1"/>
+          </p:cNvGraphicFramePr>
+          <p:nvPr/>
+        </p:nvGraphicFramePr>
+        <p:xfrm>
+          <a:off x="685800" y="1325880"/>
+          <a:ext cx="10789919" cy="877824"/>
+        </p:xfrm>
+        <a:graphic>
+          <a:graphicData uri="http://schemas.openxmlformats.org/drawingml/2006/table">
+            <a:tbl>
+              <a:tblPr firstRow="1" bandRow="1">
+                <a:tableStyleId>{5C22544A-7EE6-4342-B048-85BDC9FD1C3A}</a:tableStyleId>
+              </a:tblPr>
+              <a:tblGrid>
+                <a:gridCol w="3808207"/>
+                <a:gridCol w="6981712"/>
+              </a:tblGrid>
+              <a:tr h="292608">
+                <a:tc>
+                  <a:txBody>
+                    <a:bodyPr/>
+                    <a:lstStyle/>
+                    <a:p>
+                      <a:r>
+                        <a:rPr sz="1100" b="1">
+                          <a:solidFill>
+                            <a:srgbClr val="FFFFFF"/>
+                          </a:solidFill>
+                          <a:latin typeface="Arial"/>
+                        </a:rPr>
+                        <a:t>Panel grubu</a:t>
+                      </a:r>
+                    </a:p>
+                  </a:txBody>
+                  <a:tcPr marL="64008" marR="64008" marT="27432" marB="27432" anchor="ctr">
+                    <a:solidFill>
+                      <a:srgbClr val="1F6FEB"/>
+                    </a:solidFill>
+                  </a:tcPr>
+                </a:tc>
+                <a:tc>
+                  <a:txBody>
+                    <a:bodyPr/>
+                    <a:lstStyle/>
+                    <a:p>
+                      <a:r>
+                        <a:rPr sz="1100" b="1">
+                          <a:solidFill>
+                            <a:srgbClr val="FFFFFF"/>
+                          </a:solidFill>
+                          <a:latin typeface="Arial"/>
+                        </a:rPr>
+                        <a:t>İçerik</a:t>
+                      </a:r>
+                    </a:p>
+                  </a:txBody>
+                  <a:tcPr marL="64008" marR="64008" marT="27432" marB="27432" anchor="ctr">
+                    <a:solidFill>
+                      <a:srgbClr val="1F6FEB"/>
+                    </a:solidFill>
+                  </a:tcPr>
+                </a:tc>
+              </a:tr>
+              <a:tr h="292608">
+                <a:tc>
+                  <a:txBody>
+                    <a:bodyPr/>
+                    <a:lstStyle/>
+                    <a:p>
+                      <a:r>
+                        <a:rPr sz="1100" b="0">
+                          <a:solidFill>
+                            <a:srgbClr val="0B2545"/>
+                          </a:solidFill>
+                          <a:latin typeface="Arial"/>
+                        </a:rPr>
+                        <a:t>6 istatistik paneli</a:t>
+                      </a:r>
+                    </a:p>
+                  </a:txBody>
+                  <a:tcPr marL="64008" marR="64008" marT="27432" marB="27432" anchor="ctr">
+                    <a:solidFill>
+                      <a:srgbClr val="FFFFFF"/>
+                    </a:solidFill>
+                  </a:tcPr>
+                </a:tc>
+                <a:tc>
+                  <a:txBody>
+                    <a:bodyPr/>
+                    <a:lstStyle/>
+                    <a:p>
+                      <a:r>
+                        <a:rPr sz="1100" b="0">
+                          <a:solidFill>
+                            <a:srgbClr val="0B2545"/>
+                          </a:solidFill>
+                          <a:latin typeface="Arial"/>
+                        </a:rPr>
+                        <a:t>Toplam, Teslim, İptal, Aktif Kargo, Event, API İsteği</a:t>
+                      </a:r>
+                    </a:p>
+                  </a:txBody>
+                  <a:tcPr marL="64008" marR="64008" marT="27432" marB="27432" anchor="ctr">
+                    <a:solidFill>
+                      <a:srgbClr val="FFFFFF"/>
+                    </a:solidFill>
+                  </a:tcPr>
+                </a:tc>
+              </a:tr>
+              <a:tr h="292608">
+                <a:tc>
+                  <a:txBody>
+                    <a:bodyPr/>
+                    <a:lstStyle/>
+                    <a:p>
+                      <a:r>
+                        <a:rPr sz="1100" b="0">
+                          <a:solidFill>
+                            <a:srgbClr val="0B2545"/>
+                          </a:solidFill>
+                          <a:latin typeface="Arial"/>
+                        </a:rPr>
+                        <a:t>4 zaman serisi grafiği</a:t>
+                      </a:r>
+                    </a:p>
+                  </a:txBody>
+                  <a:tcPr marL="64008" marR="64008" marT="27432" marB="27432" anchor="ctr">
+                    <a:solidFill>
+                      <a:srgbClr val="F4F6F8"/>
+                    </a:solidFill>
+                  </a:tcPr>
+                </a:tc>
+                <a:tc>
+                  <a:txBody>
+                    <a:bodyPr/>
+                    <a:lstStyle/>
+                    <a:p>
+                      <a:r>
+                        <a:rPr sz="1100" b="0">
+                          <a:solidFill>
+                            <a:srgbClr val="0B2545"/>
+                          </a:solidFill>
+                          <a:latin typeface="Arial"/>
+                        </a:rPr>
+                        <a:t>Dakikadaki işlem, API süresi, event türleri, durum dağılımı</a:t>
+                      </a:r>
+                    </a:p>
+                  </a:txBody>
+                  <a:tcPr marL="64008" marR="64008" marT="27432" marB="27432" anchor="ctr">
+                    <a:solidFill>
+                      <a:srgbClr val="F4F6F8"/>
+                    </a:solidFill>
+                  </a:tcPr>
+                </a:tc>
+              </a:tr>
+            </a:tbl>
+          </a:graphicData>
+        </a:graphic>
+      </p:graphicFrame>
+      <p:sp>
+        <p:nvSpPr>
+          <p:cNvPr id="4" name="Rectangle 3"/>
+          <p:cNvSpPr/>
+          <p:nvPr/>
+        </p:nvSpPr>
+        <p:spPr>
+          <a:xfrm>
+            <a:off x="685800" y="2514600"/>
+            <a:ext cx="10789920" cy="457200"/>
+          </a:xfrm>
+          <a:prstGeom prst="rect">
+            <a:avLst/>
+          </a:prstGeom>
+          <a:solidFill>
+            <a:srgbClr val="1F6FEB"/>
+          </a:solidFill>
+          <a:ln>
+            <a:noFill/>
+          </a:ln>
+        </p:spPr>
+        <p:style>
+          <a:lnRef idx="1">
+            <a:schemeClr val="accent1"/>
+          </a:lnRef>
+          <a:fillRef idx="3">
+            <a:schemeClr val="accent1"/>
+          </a:fillRef>
+          <a:effectRef idx="2">
+            <a:schemeClr val="accent1"/>
+          </a:effectRef>
+          <a:fontRef idx="minor">
+            <a:schemeClr val="lt1"/>
+          </a:fontRef>
+        </p:style>
+        <p:txBody>
+          <a:bodyPr rtlCol="0" anchor="ctr" wrap="square" lIns="45720" rIns="45720" tIns="22860" bIns="22860"/>
+          <a:lstStyle/>
+          <a:p>
+            <a:pPr algn="ctr"/>
+            <a:r>
+              <a:rPr sz="1300" b="1">
+                <a:solidFill>
+                  <a:srgbClr val="FFFFFF"/>
+                </a:solidFill>
+                <a:latin typeface="Arial"/>
+              </a:rPr>
               <a:t>Dashboard JSON dosyasından provisioning ile yüklenir</a:t>
             </a:r>
           </a:p>
-          <a:p>
-            <a:pPr/>
-            <a:r>
-              <a:rPr/>
-              <a:t>Container yeniden başlasa da korunur, elle yapılandırma gerekmez</a:t>
+        </p:txBody>
+      </p:sp>
+      <p:sp>
+        <p:nvSpPr>
+          <p:cNvPr id="5" name="TextBox 4"/>
+          <p:cNvSpPr txBox="1"/>
+          <p:nvPr/>
+        </p:nvSpPr>
+        <p:spPr>
+          <a:xfrm>
+            <a:off x="685800" y="3200400"/>
+            <a:ext cx="10789920" cy="2377440"/>
+          </a:xfrm>
+          <a:prstGeom prst="rect">
+            <a:avLst/>
+          </a:prstGeom>
+          <a:noFill/>
+        </p:spPr>
+        <p:txBody>
+          <a:bodyPr wrap="square">
+            <a:spAutoFit/>
+          </a:bodyPr>
+          <a:lstStyle/>
+          <a:p>
+            <a:pPr>
+              <a:lnSpc>
+                <a:spcPct val="115000"/>
+              </a:lnSpc>
+              <a:spcAft>
+                <a:spcPts val="1000"/>
+              </a:spcAft>
+            </a:pPr>
+            <a:r>
+              <a:rPr sz="1500">
+                <a:solidFill>
+                  <a:srgbClr val="0B2545"/>
+                </a:solidFill>
+                <a:latin typeface="Arial"/>
+              </a:rPr>
+              <a:t>•  Container yeniden başlasa da korunur, elle yapılandırma gerekmez</a:t>
+            </a:r>
+          </a:p>
+          <a:p>
+            <a:pPr>
+              <a:lnSpc>
+                <a:spcPct val="115000"/>
+              </a:lnSpc>
+              <a:spcAft>
+                <a:spcPts val="1000"/>
+              </a:spcAft>
+            </a:pPr>
+            <a:r>
+              <a:rPr sz="1500">
+                <a:solidFill>
+                  <a:srgbClr val="0B2545"/>
+                </a:solidFill>
+                <a:latin typeface="Arial"/>
+              </a:rPr>
+              <a:t>•  Veri kaynağı da dosyadan tanımlanır (datasources/prometheus.yml)</a:t>
+            </a:r>
+          </a:p>
+          <a:p>
+            <a:pPr>
+              <a:lnSpc>
+                <a:spcPct val="115000"/>
+              </a:lnSpc>
+              <a:spcAft>
+                <a:spcPts val="1000"/>
+              </a:spcAft>
+            </a:pPr>
+            <a:r>
+              <a:rPr sz="1500">
+                <a:solidFill>
+                  <a:srgbClr val="0B2545"/>
+                </a:solidFill>
+                <a:latin typeface="Arial"/>
+              </a:rPr>
+              <a:t>•  Dashboard 5 saniyede bir yenilenir — Prometheus'un scrape aralığıyla aynı</a:t>
+            </a:r>
+          </a:p>
+          <a:p>
+            <a:pPr>
+              <a:lnSpc>
+                <a:spcPct val="115000"/>
+              </a:lnSpc>
+              <a:spcAft>
+                <a:spcPts val="1000"/>
+              </a:spcAft>
+            </a:pPr>
+            <a:r>
+              <a:rPr sz="1500">
+                <a:solidFill>
+                  <a:srgbClr val="0B2545"/>
+                </a:solidFill>
+                <a:latin typeface="Arial"/>
+              </a:rPr>
+              <a:t>•  Sunumdaki ekran görüntüsü: docs/grafana-dashboard.png (10 panel, canlı veri)</a:t>
             </a:r>
           </a:p>
         </p:txBody>
@@ -6574,20 +9195,38 @@
       <p:grpSpPr/>
       <p:sp>
         <p:nvSpPr>
-          <p:cNvPr id="2" name="Title 1"/>
-          <p:cNvSpPr>
-            <a:spLocks noGrp="1"/>
-          </p:cNvSpPr>
-          <p:nvPr>
-            <p:ph type="title"/>
-          </p:nvPr>
-        </p:nvSpPr>
-        <p:spPr/>
-        <p:txBody>
-          <a:bodyPr/>
-          <a:lstStyle/>
-          <a:p>
-            <a:r>
+          <p:cNvPr id="2" name="TextBox 1"/>
+          <p:cNvSpPr txBox="1"/>
+          <p:nvPr/>
+        </p:nvSpPr>
+        <p:spPr>
+          <a:xfrm>
+            <a:off x="548640" y="320040"/>
+            <a:ext cx="11064240" cy="731520"/>
+          </a:xfrm>
+          <a:prstGeom prst="rect">
+            <a:avLst/>
+          </a:prstGeom>
+          <a:noFill/>
+        </p:spPr>
+        <p:txBody>
+          <a:bodyPr wrap="square">
+            <a:spAutoFit/>
+          </a:bodyPr>
+          <a:lstStyle/>
+          <a:p>
+            <a:pPr algn="l">
+              <a:lnSpc>
+                <a:spcPct val="100000"/>
+              </a:lnSpc>
+            </a:pPr>
+            <a:r>
+              <a:rPr sz="3000" b="1">
+                <a:solidFill>
+                  <a:srgbClr val="0B2545"/>
+                </a:solidFill>
+                <a:latin typeface="Arial"/>
+              </a:rPr>
               <a:t>Test Sonuçları</a:t>
             </a:r>
           </a:p>
@@ -6595,44 +9234,99 @@
       </p:sp>
       <p:sp>
         <p:nvSpPr>
-          <p:cNvPr id="3" name="Content Placeholder 2"/>
-          <p:cNvSpPr>
-            <a:spLocks noGrp="1"/>
-          </p:cNvSpPr>
-          <p:nvPr>
-            <p:ph idx="1"/>
-          </p:nvPr>
-        </p:nvSpPr>
-        <p:spPr/>
-        <p:txBody>
-          <a:bodyPr/>
-          <a:lstStyle/>
-          <a:p>
-            <a:pPr/>
-            <a:r>
-              <a:rPr/>
-              <a:t>13 PyTest testi — doküman isteği 8, projede 13 yazıldı</a:t>
-            </a:r>
-          </a:p>
-          <a:p>
-            <a:pPr/>
-            <a:r>
-              <a:rPr/>
-              <a:t>Her test kendi geçici SQLite'ını kullanır (tmp_path) → testler izole, sırasız</a:t>
-            </a:r>
-          </a:p>
-          <a:p>
-            <a:pPr/>
-            <a:r>
-              <a:rPr/>
-              <a:t>Testler KAFKA_ENABLED=0 ile Kafka bağımsız koşar</a:t>
-            </a:r>
-          </a:p>
-          <a:p>
-            <a:pPr/>
-            <a:r>
-              <a:rPr/>
-              <a:t>Tam akış senaryosu: 20 kargo → 10 IN_TRANSIT → 5 DELIVERED → 2 CANCELLED</a:t>
+          <p:cNvPr id="3" name="TextBox 2"/>
+          <p:cNvSpPr txBox="1"/>
+          <p:nvPr/>
+        </p:nvSpPr>
+        <p:spPr>
+          <a:xfrm>
+            <a:off x="685800" y="1280160"/>
+            <a:ext cx="10789920" cy="2011680"/>
+          </a:xfrm>
+          <a:prstGeom prst="rect">
+            <a:avLst/>
+          </a:prstGeom>
+          <a:noFill/>
+        </p:spPr>
+        <p:txBody>
+          <a:bodyPr wrap="square">
+            <a:spAutoFit/>
+          </a:bodyPr>
+          <a:lstStyle/>
+          <a:p>
+            <a:pPr>
+              <a:lnSpc>
+                <a:spcPct val="115000"/>
+              </a:lnSpc>
+              <a:spcAft>
+                <a:spcPts val="900"/>
+              </a:spcAft>
+            </a:pPr>
+            <a:r>
+              <a:rPr sz="1500">
+                <a:solidFill>
+                  <a:srgbClr val="0B2545"/>
+                </a:solidFill>
+                <a:latin typeface="Arial"/>
+              </a:rPr>
+              <a:t>•  13 PyTest testi yazıldı (doküman isteği: en az 8)</a:t>
+            </a:r>
+          </a:p>
+          <a:p>
+            <a:pPr>
+              <a:lnSpc>
+                <a:spcPct val="115000"/>
+              </a:lnSpc>
+              <a:spcAft>
+                <a:spcPts val="900"/>
+              </a:spcAft>
+            </a:pPr>
+            <a:r>
+              <a:rPr sz="1500">
+                <a:solidFill>
+                  <a:srgbClr val="0B2545"/>
+                </a:solidFill>
+                <a:latin typeface="Arial"/>
+              </a:rPr>
+              <a:t>•  Her test kendi geçici SQLite'ını kullanır (tmp_path) → testler izole ve sırasız</a:t>
+            </a:r>
+          </a:p>
+          <a:p>
+            <a:pPr>
+              <a:lnSpc>
+                <a:spcPct val="115000"/>
+              </a:lnSpc>
+              <a:spcAft>
+                <a:spcPts val="900"/>
+              </a:spcAft>
+            </a:pPr>
+            <a:r>
+              <a:rPr sz="1500">
+                <a:solidFill>
+                  <a:srgbClr val="0B2545"/>
+                </a:solidFill>
+                <a:latin typeface="Arial"/>
+              </a:rPr>
+              <a:t>•  Testler KAFKA_ENABLED=0 ile Kafka bağımsız koşar</a:t>
+            </a:r>
+          </a:p>
+          <a:p>
+            <a:pPr>
+              <a:lnSpc>
+                <a:spcPct val="115000"/>
+              </a:lnSpc>
+              <a:spcAft>
+                <a:spcPts val="900"/>
+              </a:spcAft>
+            </a:pPr>
+            <a:r>
+              <a:rPr sz="1500">
+                <a:solidFill>
+                  <a:srgbClr val="0B2545"/>
+                </a:solidFill>
+                <a:latin typeface="Arial"/>
+              </a:rPr>
+              <a:t>•  Tam akış senaryosu: 20 kargo → 10 IN_TRANSIT → 5 DELIVERED → 2 CANCELLED</a:t>
             </a:r>
           </a:p>
         </p:txBody>
@@ -6646,8 +9340,8 @@
           <p:nvPr/>
         </p:nvGraphicFramePr>
         <p:xfrm>
-          <a:off x="914400" y="1828800"/>
-          <a:ext cx="5486400" cy="1828800"/>
+          <a:off x="685800" y="3429000"/>
+          <a:ext cx="10789919" cy="1463040"/>
         </p:xfrm>
         <a:graphic>
           <a:graphicData uri="http://schemas.openxmlformats.org/drawingml/2006/table">
@@ -6656,21 +9350,31 @@
                 <a:tableStyleId>{5C22544A-7EE6-4342-B048-85BDC9FD1C3A}</a:tableStyleId>
               </a:tblPr>
               <a:tblGrid>
-                <a:gridCol w="2743200"/>
-                <a:gridCol w="2743200"/>
+                <a:gridCol w="3452774"/>
+                <a:gridCol w="7337145"/>
               </a:tblGrid>
-              <a:tr h="365760">
+              <a:tr h="292608">
                 <a:tc>
                   <a:txBody>
                     <a:bodyPr/>
                     <a:lstStyle/>
                     <a:p>
                       <a:r>
+                        <a:rPr sz="1100" b="1">
+                          <a:solidFill>
+                            <a:srgbClr val="FFFFFF"/>
+                          </a:solidFill>
+                          <a:latin typeface="Arial"/>
+                        </a:rPr>
                         <a:t>Kontrol</a:t>
                       </a:r>
                     </a:p>
                   </a:txBody>
-                  <a:tcPr/>
+                  <a:tcPr marL="64008" marR="64008" marT="27432" marB="27432" anchor="ctr">
+                    <a:solidFill>
+                      <a:srgbClr val="1F6FEB"/>
+                    </a:solidFill>
+                  </a:tcPr>
                 </a:tc>
                 <a:tc>
                   <a:txBody>
@@ -6678,25 +9382,45 @@
                     <a:lstStyle/>
                     <a:p>
                       <a:r>
+                        <a:rPr sz="1100" b="1">
+                          <a:solidFill>
+                            <a:srgbClr val="FFFFFF"/>
+                          </a:solidFill>
+                          <a:latin typeface="Arial"/>
+                        </a:rPr>
                         <a:t>Sonuç</a:t>
                       </a:r>
                     </a:p>
                   </a:txBody>
-                  <a:tcPr/>
+                  <a:tcPr marL="64008" marR="64008" marT="27432" marB="27432" anchor="ctr">
+                    <a:solidFill>
+                      <a:srgbClr val="1F6FEB"/>
+                    </a:solidFill>
+                  </a:tcPr>
                 </a:tc>
               </a:tr>
-              <a:tr h="365760">
+              <a:tr h="292608">
                 <a:tc>
                   <a:txBody>
                     <a:bodyPr/>
                     <a:lstStyle/>
                     <a:p>
                       <a:r>
+                        <a:rPr sz="1100" b="0">
+                          <a:solidFill>
+                            <a:srgbClr val="0B2545"/>
+                          </a:solidFill>
+                          <a:latin typeface="Arial"/>
+                        </a:rPr>
                         <a:t>PyTest</a:t>
                       </a:r>
                     </a:p>
                   </a:txBody>
-                  <a:tcPr/>
+                  <a:tcPr marL="64008" marR="64008" marT="27432" marB="27432" anchor="ctr">
+                    <a:solidFill>
+                      <a:srgbClr val="FFFFFF"/>
+                    </a:solidFill>
+                  </a:tcPr>
                 </a:tc>
                 <a:tc>
                   <a:txBody>
@@ -6704,25 +9428,45 @@
                     <a:lstStyle/>
                     <a:p>
                       <a:r>
+                        <a:rPr sz="1100" b="0">
+                          <a:solidFill>
+                            <a:srgbClr val="0B2545"/>
+                          </a:solidFill>
+                          <a:latin typeface="Arial"/>
+                        </a:rPr>
                         <a:t>13 passed in 1.75s</a:t>
                       </a:r>
                     </a:p>
                   </a:txBody>
-                  <a:tcPr/>
+                  <a:tcPr marL="64008" marR="64008" marT="27432" marB="27432" anchor="ctr">
+                    <a:solidFill>
+                      <a:srgbClr val="FFFFFF"/>
+                    </a:solidFill>
+                  </a:tcPr>
                 </a:tc>
               </a:tr>
-              <a:tr h="365760">
+              <a:tr h="292608">
                 <a:tc>
                   <a:txBody>
                     <a:bodyPr/>
                     <a:lstStyle/>
                     <a:p>
                       <a:r>
+                        <a:rPr sz="1100" b="0">
+                          <a:solidFill>
+                            <a:srgbClr val="0B2545"/>
+                          </a:solidFill>
+                          <a:latin typeface="Arial"/>
+                        </a:rPr>
                         <a:t>API metrikleri</a:t>
                       </a:r>
                     </a:p>
                   </a:txBody>
-                  <a:tcPr/>
+                  <a:tcPr marL="64008" marR="64008" marT="27432" marB="27432" anchor="ctr">
+                    <a:solidFill>
+                      <a:srgbClr val="F4F6F8"/>
+                    </a:solidFill>
+                  </a:tcPr>
                 </a:tc>
                 <a:tc>
                   <a:txBody>
@@ -6730,25 +9474,45 @@
                     <a:lstStyle/>
                     <a:p>
                       <a:r>
-                        <a:t>20 / 5 / 2 / 17</a:t>
+                        <a:rPr sz="1100" b="0">
+                          <a:solidFill>
+                            <a:srgbClr val="0B2545"/>
+                          </a:solidFill>
+                          <a:latin typeface="Arial"/>
+                        </a:rPr>
+                        <a:t>oluşturma 20 · teslim 5 · iptal 2 · durum değişikliği 17</a:t>
                       </a:r>
                     </a:p>
                   </a:txBody>
-                  <a:tcPr/>
+                  <a:tcPr marL="64008" marR="64008" marT="27432" marB="27432" anchor="ctr">
+                    <a:solidFill>
+                      <a:srgbClr val="F4F6F8"/>
+                    </a:solidFill>
+                  </a:tcPr>
                 </a:tc>
               </a:tr>
-              <a:tr h="365760">
+              <a:tr h="292608">
                 <a:tc>
                   <a:txBody>
                     <a:bodyPr/>
                     <a:lstStyle/>
                     <a:p>
                       <a:r>
+                        <a:rPr sz="1100" b="0">
+                          <a:solidFill>
+                            <a:srgbClr val="0B2545"/>
+                          </a:solidFill>
+                          <a:latin typeface="Arial"/>
+                        </a:rPr>
                         <a:t>Consumer metrikleri</a:t>
                       </a:r>
                     </a:p>
                   </a:txBody>
-                  <a:tcPr/>
+                  <a:tcPr marL="64008" marR="64008" marT="27432" marB="27432" anchor="ctr">
+                    <a:solidFill>
+                      <a:srgbClr val="FFFFFF"/>
+                    </a:solidFill>
+                  </a:tcPr>
                 </a:tc>
                 <a:tc>
                   <a:txBody>
@@ -6756,25 +9520,45 @@
                     <a:lstStyle/>
                     <a:p>
                       <a:r>
-                        <a:t>20 / 17 / 5 / 2</a:t>
+                        <a:rPr sz="1100" b="0">
+                          <a:solidFill>
+                            <a:srgbClr val="0B2545"/>
+                          </a:solidFill>
+                          <a:latin typeface="Arial"/>
+                        </a:rPr>
+                        <a:t>created 20 · status_changed 17 · delivered 5 · cancelled 2</a:t>
                       </a:r>
                     </a:p>
                   </a:txBody>
-                  <a:tcPr/>
+                  <a:tcPr marL="64008" marR="64008" marT="27432" marB="27432" anchor="ctr">
+                    <a:solidFill>
+                      <a:srgbClr val="FFFFFF"/>
+                    </a:solidFill>
+                  </a:tcPr>
                 </a:tc>
               </a:tr>
-              <a:tr h="365760">
+              <a:tr h="292608">
                 <a:tc>
                   <a:txBody>
                     <a:bodyPr/>
                     <a:lstStyle/>
                     <a:p>
                       <a:r>
+                        <a:rPr sz="1100" b="0">
+                          <a:solidFill>
+                            <a:srgbClr val="0B2545"/>
+                          </a:solidFill>
+                          <a:latin typeface="Arial"/>
+                        </a:rPr>
                         <a:t>Prometheus hedefleri</a:t>
                       </a:r>
                     </a:p>
                   </a:txBody>
-                  <a:tcPr/>
+                  <a:tcPr marL="64008" marR="64008" marT="27432" marB="27432" anchor="ctr">
+                    <a:solidFill>
+                      <a:srgbClr val="F4F6F8"/>
+                    </a:solidFill>
+                  </a:tcPr>
                 </a:tc>
                 <a:tc>
                   <a:txBody>
@@ -6782,17 +9566,79 @@
                     <a:lstStyle/>
                     <a:p>
                       <a:r>
+                        <a:rPr sz="1100" b="0">
+                          <a:solidFill>
+                            <a:srgbClr val="0B2545"/>
+                          </a:solidFill>
+                          <a:latin typeface="Arial"/>
+                        </a:rPr>
                         <a:t>cargo-api up, cargo-consumer up</a:t>
                       </a:r>
                     </a:p>
                   </a:txBody>
-                  <a:tcPr/>
+                  <a:tcPr marL="64008" marR="64008" marT="27432" marB="27432" anchor="ctr">
+                    <a:solidFill>
+                      <a:srgbClr val="F4F6F8"/>
+                    </a:solidFill>
+                  </a:tcPr>
                 </a:tc>
               </a:tr>
             </a:tbl>
           </a:graphicData>
         </a:graphic>
       </p:graphicFrame>
+      <p:sp>
+        <p:nvSpPr>
+          <p:cNvPr id="5" name="Rectangle 4"/>
+          <p:cNvSpPr/>
+          <p:nvPr/>
+        </p:nvSpPr>
+        <p:spPr>
+          <a:xfrm>
+            <a:off x="685800" y="5349240"/>
+            <a:ext cx="10789920" cy="548640"/>
+          </a:xfrm>
+          <a:prstGeom prst="rect">
+            <a:avLst/>
+          </a:prstGeom>
+          <a:solidFill>
+            <a:srgbClr val="E85D04"/>
+          </a:solidFill>
+          <a:ln>
+            <a:noFill/>
+          </a:ln>
+        </p:spPr>
+        <p:style>
+          <a:lnRef idx="1">
+            <a:schemeClr val="accent1"/>
+          </a:lnRef>
+          <a:fillRef idx="3">
+            <a:schemeClr val="accent1"/>
+          </a:fillRef>
+          <a:effectRef idx="2">
+            <a:schemeClr val="accent1"/>
+          </a:effectRef>
+          <a:fontRef idx="minor">
+            <a:schemeClr val="lt1"/>
+          </a:fontRef>
+        </p:style>
+        <p:txBody>
+          <a:bodyPr rtlCol="0" anchor="ctr" wrap="square" lIns="45720" rIns="45720" tIns="22860" bIns="22860"/>
+          <a:lstStyle/>
+          <a:p>
+            <a:pPr algn="ctr"/>
+            <a:r>
+              <a:rPr sz="1400" b="1">
+                <a:solidFill>
+                  <a:srgbClr val="FFFFFF"/>
+                </a:solidFill>
+                <a:latin typeface="Arial"/>
+              </a:rPr>
+              <a:t>API sayaçları ile consumer sayaçları BİREBİR AYNI  →  event'ler kayıpsız iletildi</a:t>
+            </a:r>
+          </a:p>
+        </p:txBody>
+      </p:sp>
     </p:spTree>
   </p:cSld>
   <p:clrMapOvr>
